--- a/Ekinox_Fraud_Intelligence_Accelerator_Presentation.pptx
+++ b/Ekinox_Fraud_Intelligence_Accelerator_Presentation.pptx
@@ -5,23 +5,21 @@
     <p:sldMasterId id="2147483648" r:id="rId1"/>
   </p:sldMasterIdLst>
   <p:sldIdLst>
-    <p:sldId id="256" r:id="rId7"/>
-    <p:sldId id="257" r:id="rId8"/>
-    <p:sldId id="258" r:id="rId9"/>
-    <p:sldId id="259" r:id="rId10"/>
-    <p:sldId id="260" r:id="rId11"/>
-    <p:sldId id="261" r:id="rId12"/>
-    <p:sldId id="262" r:id="rId13"/>
-    <p:sldId id="263" r:id="rId14"/>
-    <p:sldId id="264" r:id="rId15"/>
-    <p:sldId id="265" r:id="rId16"/>
-    <p:sldId id="266" r:id="rId17"/>
-    <p:sldId id="267" r:id="rId18"/>
-    <p:sldId id="268" r:id="rId19"/>
-    <p:sldId id="269" r:id="rId20"/>
-    <p:sldId id="270" r:id="rId21"/>
+    <p:sldId id="257" r:id="rId2"/>
+    <p:sldId id="258" r:id="rId3"/>
+    <p:sldId id="259" r:id="rId4"/>
+    <p:sldId id="260" r:id="rId5"/>
+    <p:sldId id="261" r:id="rId6"/>
+    <p:sldId id="262" r:id="rId7"/>
+    <p:sldId id="263" r:id="rId8"/>
+    <p:sldId id="264" r:id="rId9"/>
+    <p:sldId id="265" r:id="rId10"/>
+    <p:sldId id="266" r:id="rId11"/>
+    <p:sldId id="267" r:id="rId12"/>
+    <p:sldId id="268" r:id="rId13"/>
+    <p:sldId id="269" r:id="rId14"/>
   </p:sldIdLst>
-  <p:sldSz cx="12191695" cy="6858000" type="screen4x3"/>
+  <p:sldSz cx="12192000" cy="6858000"/>
   <p:notesSz cx="6858000" cy="9144000"/>
   <p:defaultTextStyle>
     <a:defPPr>
@@ -118,6 +116,22 @@
       </a:defRPr>
     </a:lvl9pPr>
   </p:defaultTextStyle>
+  <p:extLst>
+    <p:ext uri="{EFAFB233-063F-42B5-8137-9DF3F51BA10A}">
+      <p15:sldGuideLst xmlns:p15="http://schemas.microsoft.com/office/powerpoint/2012/main">
+        <p15:guide id="1" orient="horz" pos="2160">
+          <p15:clr>
+            <a:srgbClr val="A4A3A4"/>
+          </p15:clr>
+        </p15:guide>
+        <p15:guide id="2" pos="2880">
+          <p15:clr>
+            <a:srgbClr val="A4A3A4"/>
+          </p15:clr>
+        </p15:guide>
+      </p15:sldGuideLst>
+    </p:ext>
+  </p:extLst>
 </p:presentation>
 </file>
 
@@ -159,10 +173,9 @@
           <a:lstStyle/>
           <a:p>
             <a:r>
-              <a:rPr lang="en-US" smtClean="0"/>
+              <a:rPr lang="en-US"/>
               <a:t>Click to edit Master title style</a:t>
             </a:r>
-            <a:endParaRPr lang="en-US"/>
           </a:p>
         </p:txBody>
       </p:sp>
@@ -278,10 +291,9 @@
           </a:lstStyle>
           <a:p>
             <a:r>
-              <a:rPr lang="en-US" smtClean="0"/>
+              <a:rPr lang="en-US"/>
               <a:t>Click to edit Master subtitle style</a:t>
             </a:r>
-            <a:endParaRPr lang="en-US"/>
           </a:p>
         </p:txBody>
       </p:sp>
@@ -302,7 +314,7 @@
           <a:p>
             <a:fld id="{5BCAD085-E8A6-8845-BD4E-CB4CCA059FC4}" type="datetimeFigureOut">
               <a:rPr lang="en-US" smtClean="0"/>
-              <a:t>1/27/13</a:t>
+              <a:t>7/28/2026</a:t>
             </a:fld>
             <a:endParaRPr lang="en-US"/>
           </a:p>
@@ -396,10 +408,9 @@
           <a:lstStyle/>
           <a:p>
             <a:r>
-              <a:rPr lang="en-US" smtClean="0"/>
+              <a:rPr lang="en-US"/>
               <a:t>Click to edit Master title style</a:t>
             </a:r>
-            <a:endParaRPr lang="en-US"/>
           </a:p>
         </p:txBody>
       </p:sp>
@@ -420,38 +431,37 @@
           <a:p>
             <a:pPr lvl="0"/>
             <a:r>
-              <a:rPr lang="en-US" smtClean="0"/>
+              <a:rPr lang="en-US"/>
               <a:t>Click to edit Master text styles</a:t>
             </a:r>
           </a:p>
           <a:p>
             <a:pPr lvl="1"/>
             <a:r>
-              <a:rPr lang="en-US" smtClean="0"/>
+              <a:rPr lang="en-US"/>
               <a:t>Second level</a:t>
             </a:r>
           </a:p>
           <a:p>
             <a:pPr lvl="2"/>
             <a:r>
-              <a:rPr lang="en-US" smtClean="0"/>
+              <a:rPr lang="en-US"/>
               <a:t>Third level</a:t>
             </a:r>
           </a:p>
           <a:p>
             <a:pPr lvl="3"/>
             <a:r>
-              <a:rPr lang="en-US" smtClean="0"/>
+              <a:rPr lang="en-US"/>
               <a:t>Fourth level</a:t>
             </a:r>
           </a:p>
           <a:p>
             <a:pPr lvl="4"/>
             <a:r>
-              <a:rPr lang="en-US" smtClean="0"/>
+              <a:rPr lang="en-US"/>
               <a:t>Fifth level</a:t>
             </a:r>
-            <a:endParaRPr lang="en-US"/>
           </a:p>
         </p:txBody>
       </p:sp>
@@ -472,7 +482,7 @@
           <a:p>
             <a:fld id="{5BCAD085-E8A6-8845-BD4E-CB4CCA059FC4}" type="datetimeFigureOut">
               <a:rPr lang="en-US" smtClean="0"/>
-              <a:t>1/27/13</a:t>
+              <a:t>7/28/2026</a:t>
             </a:fld>
             <a:endParaRPr lang="en-US"/>
           </a:p>
@@ -571,10 +581,9 @@
           <a:lstStyle/>
           <a:p>
             <a:r>
-              <a:rPr lang="en-US" smtClean="0"/>
+              <a:rPr lang="en-US"/>
               <a:t>Click to edit Master title style</a:t>
             </a:r>
-            <a:endParaRPr lang="en-US"/>
           </a:p>
         </p:txBody>
       </p:sp>
@@ -600,38 +609,37 @@
           <a:p>
             <a:pPr lvl="0"/>
             <a:r>
-              <a:rPr lang="en-US" smtClean="0"/>
+              <a:rPr lang="en-US"/>
               <a:t>Click to edit Master text styles</a:t>
             </a:r>
           </a:p>
           <a:p>
             <a:pPr lvl="1"/>
             <a:r>
-              <a:rPr lang="en-US" smtClean="0"/>
+              <a:rPr lang="en-US"/>
               <a:t>Second level</a:t>
             </a:r>
           </a:p>
           <a:p>
             <a:pPr lvl="2"/>
             <a:r>
-              <a:rPr lang="en-US" smtClean="0"/>
+              <a:rPr lang="en-US"/>
               <a:t>Third level</a:t>
             </a:r>
           </a:p>
           <a:p>
             <a:pPr lvl="3"/>
             <a:r>
-              <a:rPr lang="en-US" smtClean="0"/>
+              <a:rPr lang="en-US"/>
               <a:t>Fourth level</a:t>
             </a:r>
           </a:p>
           <a:p>
             <a:pPr lvl="4"/>
             <a:r>
-              <a:rPr lang="en-US" smtClean="0"/>
+              <a:rPr lang="en-US"/>
               <a:t>Fifth level</a:t>
             </a:r>
-            <a:endParaRPr lang="en-US"/>
           </a:p>
         </p:txBody>
       </p:sp>
@@ -652,7 +660,7 @@
           <a:p>
             <a:fld id="{5BCAD085-E8A6-8845-BD4E-CB4CCA059FC4}" type="datetimeFigureOut">
               <a:rPr lang="en-US" smtClean="0"/>
-              <a:t>1/27/13</a:t>
+              <a:t>7/28/2026</a:t>
             </a:fld>
             <a:endParaRPr lang="en-US"/>
           </a:p>
@@ -746,10 +754,9 @@
           <a:lstStyle/>
           <a:p>
             <a:r>
-              <a:rPr lang="en-US" smtClean="0"/>
+              <a:rPr lang="en-US"/>
               <a:t>Click to edit Master title style</a:t>
             </a:r>
-            <a:endParaRPr lang="en-US"/>
           </a:p>
         </p:txBody>
       </p:sp>
@@ -770,38 +777,37 @@
           <a:p>
             <a:pPr lvl="0"/>
             <a:r>
-              <a:rPr lang="en-US" smtClean="0"/>
+              <a:rPr lang="en-US"/>
               <a:t>Click to edit Master text styles</a:t>
             </a:r>
           </a:p>
           <a:p>
             <a:pPr lvl="1"/>
             <a:r>
-              <a:rPr lang="en-US" smtClean="0"/>
+              <a:rPr lang="en-US"/>
               <a:t>Second level</a:t>
             </a:r>
           </a:p>
           <a:p>
             <a:pPr lvl="2"/>
             <a:r>
-              <a:rPr lang="en-US" smtClean="0"/>
+              <a:rPr lang="en-US"/>
               <a:t>Third level</a:t>
             </a:r>
           </a:p>
           <a:p>
             <a:pPr lvl="3"/>
             <a:r>
-              <a:rPr lang="en-US" smtClean="0"/>
+              <a:rPr lang="en-US"/>
               <a:t>Fourth level</a:t>
             </a:r>
           </a:p>
           <a:p>
             <a:pPr lvl="4"/>
             <a:r>
-              <a:rPr lang="en-US" smtClean="0"/>
+              <a:rPr lang="en-US"/>
               <a:t>Fifth level</a:t>
             </a:r>
-            <a:endParaRPr lang="en-US"/>
           </a:p>
         </p:txBody>
       </p:sp>
@@ -822,7 +828,7 @@
           <a:p>
             <a:fld id="{5BCAD085-E8A6-8845-BD4E-CB4CCA059FC4}" type="datetimeFigureOut">
               <a:rPr lang="en-US" smtClean="0"/>
-              <a:t>1/27/13</a:t>
+              <a:t>7/28/2026</a:t>
             </a:fld>
             <a:endParaRPr lang="en-US"/>
           </a:p>
@@ -925,10 +931,9 @@
           </a:lstStyle>
           <a:p>
             <a:r>
-              <a:rPr lang="en-US" smtClean="0"/>
+              <a:rPr lang="en-US"/>
               <a:t>Click to edit Master title style</a:t>
             </a:r>
-            <a:endParaRPr lang="en-US"/>
           </a:p>
         </p:txBody>
       </p:sp>
@@ -1045,7 +1050,7 @@
           <a:p>
             <a:pPr lvl="0"/>
             <a:r>
-              <a:rPr lang="en-US" smtClean="0"/>
+              <a:rPr lang="en-US"/>
               <a:t>Click to edit Master text styles</a:t>
             </a:r>
           </a:p>
@@ -1068,7 +1073,7 @@
           <a:p>
             <a:fld id="{5BCAD085-E8A6-8845-BD4E-CB4CCA059FC4}" type="datetimeFigureOut">
               <a:rPr lang="en-US" smtClean="0"/>
-              <a:t>1/27/13</a:t>
+              <a:t>7/28/2026</a:t>
             </a:fld>
             <a:endParaRPr lang="en-US"/>
           </a:p>
@@ -1162,10 +1167,9 @@
           <a:lstStyle/>
           <a:p>
             <a:r>
-              <a:rPr lang="en-US" smtClean="0"/>
+              <a:rPr lang="en-US"/>
               <a:t>Click to edit Master title style</a:t>
             </a:r>
-            <a:endParaRPr lang="en-US"/>
           </a:p>
         </p:txBody>
       </p:sp>
@@ -1219,38 +1223,37 @@
           <a:p>
             <a:pPr lvl="0"/>
             <a:r>
-              <a:rPr lang="en-US" smtClean="0"/>
+              <a:rPr lang="en-US"/>
               <a:t>Click to edit Master text styles</a:t>
             </a:r>
           </a:p>
           <a:p>
             <a:pPr lvl="1"/>
             <a:r>
-              <a:rPr lang="en-US" smtClean="0"/>
+              <a:rPr lang="en-US"/>
               <a:t>Second level</a:t>
             </a:r>
           </a:p>
           <a:p>
             <a:pPr lvl="2"/>
             <a:r>
-              <a:rPr lang="en-US" smtClean="0"/>
+              <a:rPr lang="en-US"/>
               <a:t>Third level</a:t>
             </a:r>
           </a:p>
           <a:p>
             <a:pPr lvl="3"/>
             <a:r>
-              <a:rPr lang="en-US" smtClean="0"/>
+              <a:rPr lang="en-US"/>
               <a:t>Fourth level</a:t>
             </a:r>
           </a:p>
           <a:p>
             <a:pPr lvl="4"/>
             <a:r>
-              <a:rPr lang="en-US" smtClean="0"/>
+              <a:rPr lang="en-US"/>
               <a:t>Fifth level</a:t>
             </a:r>
-            <a:endParaRPr lang="en-US"/>
           </a:p>
         </p:txBody>
       </p:sp>
@@ -1304,38 +1307,37 @@
           <a:p>
             <a:pPr lvl="0"/>
             <a:r>
-              <a:rPr lang="en-US" smtClean="0"/>
+              <a:rPr lang="en-US"/>
               <a:t>Click to edit Master text styles</a:t>
             </a:r>
           </a:p>
           <a:p>
             <a:pPr lvl="1"/>
             <a:r>
-              <a:rPr lang="en-US" smtClean="0"/>
+              <a:rPr lang="en-US"/>
               <a:t>Second level</a:t>
             </a:r>
           </a:p>
           <a:p>
             <a:pPr lvl="2"/>
             <a:r>
-              <a:rPr lang="en-US" smtClean="0"/>
+              <a:rPr lang="en-US"/>
               <a:t>Third level</a:t>
             </a:r>
           </a:p>
           <a:p>
             <a:pPr lvl="3"/>
             <a:r>
-              <a:rPr lang="en-US" smtClean="0"/>
+              <a:rPr lang="en-US"/>
               <a:t>Fourth level</a:t>
             </a:r>
           </a:p>
           <a:p>
             <a:pPr lvl="4"/>
             <a:r>
-              <a:rPr lang="en-US" smtClean="0"/>
+              <a:rPr lang="en-US"/>
               <a:t>Fifth level</a:t>
             </a:r>
-            <a:endParaRPr lang="en-US"/>
           </a:p>
         </p:txBody>
       </p:sp>
@@ -1356,7 +1358,7 @@
           <a:p>
             <a:fld id="{5BCAD085-E8A6-8845-BD4E-CB4CCA059FC4}" type="datetimeFigureOut">
               <a:rPr lang="en-US" smtClean="0"/>
-              <a:t>1/27/13</a:t>
+              <a:t>7/28/2026</a:t>
             </a:fld>
             <a:endParaRPr lang="en-US"/>
           </a:p>
@@ -1454,10 +1456,9 @@
           </a:lstStyle>
           <a:p>
             <a:r>
-              <a:rPr lang="en-US" smtClean="0"/>
+              <a:rPr lang="en-US"/>
               <a:t>Click to edit Master title style</a:t>
             </a:r>
-            <a:endParaRPr lang="en-US"/>
           </a:p>
         </p:txBody>
       </p:sp>
@@ -1520,7 +1521,7 @@
           <a:p>
             <a:pPr lvl="0"/>
             <a:r>
-              <a:rPr lang="en-US" smtClean="0"/>
+              <a:rPr lang="en-US"/>
               <a:t>Click to edit Master text styles</a:t>
             </a:r>
           </a:p>
@@ -1576,38 +1577,37 @@
           <a:p>
             <a:pPr lvl="0"/>
             <a:r>
-              <a:rPr lang="en-US" smtClean="0"/>
+              <a:rPr lang="en-US"/>
               <a:t>Click to edit Master text styles</a:t>
             </a:r>
           </a:p>
           <a:p>
             <a:pPr lvl="1"/>
             <a:r>
-              <a:rPr lang="en-US" smtClean="0"/>
+              <a:rPr lang="en-US"/>
               <a:t>Second level</a:t>
             </a:r>
           </a:p>
           <a:p>
             <a:pPr lvl="2"/>
             <a:r>
-              <a:rPr lang="en-US" smtClean="0"/>
+              <a:rPr lang="en-US"/>
               <a:t>Third level</a:t>
             </a:r>
           </a:p>
           <a:p>
             <a:pPr lvl="3"/>
             <a:r>
-              <a:rPr lang="en-US" smtClean="0"/>
+              <a:rPr lang="en-US"/>
               <a:t>Fourth level</a:t>
             </a:r>
           </a:p>
           <a:p>
             <a:pPr lvl="4"/>
             <a:r>
-              <a:rPr lang="en-US" smtClean="0"/>
+              <a:rPr lang="en-US"/>
               <a:t>Fifth level</a:t>
             </a:r>
-            <a:endParaRPr lang="en-US"/>
           </a:p>
         </p:txBody>
       </p:sp>
@@ -1670,7 +1670,7 @@
           <a:p>
             <a:pPr lvl="0"/>
             <a:r>
-              <a:rPr lang="en-US" smtClean="0"/>
+              <a:rPr lang="en-US"/>
               <a:t>Click to edit Master text styles</a:t>
             </a:r>
           </a:p>
@@ -1726,38 +1726,37 @@
           <a:p>
             <a:pPr lvl="0"/>
             <a:r>
-              <a:rPr lang="en-US" smtClean="0"/>
+              <a:rPr lang="en-US"/>
               <a:t>Click to edit Master text styles</a:t>
             </a:r>
           </a:p>
           <a:p>
             <a:pPr lvl="1"/>
             <a:r>
-              <a:rPr lang="en-US" smtClean="0"/>
+              <a:rPr lang="en-US"/>
               <a:t>Second level</a:t>
             </a:r>
           </a:p>
           <a:p>
             <a:pPr lvl="2"/>
             <a:r>
-              <a:rPr lang="en-US" smtClean="0"/>
+              <a:rPr lang="en-US"/>
               <a:t>Third level</a:t>
             </a:r>
           </a:p>
           <a:p>
             <a:pPr lvl="3"/>
             <a:r>
-              <a:rPr lang="en-US" smtClean="0"/>
+              <a:rPr lang="en-US"/>
               <a:t>Fourth level</a:t>
             </a:r>
           </a:p>
           <a:p>
             <a:pPr lvl="4"/>
             <a:r>
-              <a:rPr lang="en-US" smtClean="0"/>
+              <a:rPr lang="en-US"/>
               <a:t>Fifth level</a:t>
             </a:r>
-            <a:endParaRPr lang="en-US"/>
           </a:p>
         </p:txBody>
       </p:sp>
@@ -1778,7 +1777,7 @@
           <a:p>
             <a:fld id="{5BCAD085-E8A6-8845-BD4E-CB4CCA059FC4}" type="datetimeFigureOut">
               <a:rPr lang="en-US" smtClean="0"/>
-              <a:t>1/27/13</a:t>
+              <a:t>7/28/2026</a:t>
             </a:fld>
             <a:endParaRPr lang="en-US"/>
           </a:p>
@@ -1872,10 +1871,9 @@
           <a:lstStyle/>
           <a:p>
             <a:r>
-              <a:rPr lang="en-US" smtClean="0"/>
+              <a:rPr lang="en-US"/>
               <a:t>Click to edit Master title style</a:t>
             </a:r>
-            <a:endParaRPr lang="en-US"/>
           </a:p>
         </p:txBody>
       </p:sp>
@@ -1896,7 +1894,7 @@
           <a:p>
             <a:fld id="{5BCAD085-E8A6-8845-BD4E-CB4CCA059FC4}" type="datetimeFigureOut">
               <a:rPr lang="en-US" smtClean="0"/>
-              <a:t>1/27/13</a:t>
+              <a:t>7/28/2026</a:t>
             </a:fld>
             <a:endParaRPr lang="en-US"/>
           </a:p>
@@ -1991,7 +1989,7 @@
           <a:p>
             <a:fld id="{5BCAD085-E8A6-8845-BD4E-CB4CCA059FC4}" type="datetimeFigureOut">
               <a:rPr lang="en-US" smtClean="0"/>
-              <a:t>1/27/13</a:t>
+              <a:t>7/28/2026</a:t>
             </a:fld>
             <a:endParaRPr lang="en-US"/>
           </a:p>
@@ -2094,10 +2092,9 @@
           </a:lstStyle>
           <a:p>
             <a:r>
-              <a:rPr lang="en-US" smtClean="0"/>
+              <a:rPr lang="en-US"/>
               <a:t>Click to edit Master title style</a:t>
             </a:r>
-            <a:endParaRPr lang="en-US"/>
           </a:p>
         </p:txBody>
       </p:sp>
@@ -2151,38 +2148,37 @@
           <a:p>
             <a:pPr lvl="0"/>
             <a:r>
-              <a:rPr lang="en-US" smtClean="0"/>
+              <a:rPr lang="en-US"/>
               <a:t>Click to edit Master text styles</a:t>
             </a:r>
           </a:p>
           <a:p>
             <a:pPr lvl="1"/>
             <a:r>
-              <a:rPr lang="en-US" smtClean="0"/>
+              <a:rPr lang="en-US"/>
               <a:t>Second level</a:t>
             </a:r>
           </a:p>
           <a:p>
             <a:pPr lvl="2"/>
             <a:r>
-              <a:rPr lang="en-US" smtClean="0"/>
+              <a:rPr lang="en-US"/>
               <a:t>Third level</a:t>
             </a:r>
           </a:p>
           <a:p>
             <a:pPr lvl="3"/>
             <a:r>
-              <a:rPr lang="en-US" smtClean="0"/>
+              <a:rPr lang="en-US"/>
               <a:t>Fourth level</a:t>
             </a:r>
           </a:p>
           <a:p>
             <a:pPr lvl="4"/>
             <a:r>
-              <a:rPr lang="en-US" smtClean="0"/>
+              <a:rPr lang="en-US"/>
               <a:t>Fifth level</a:t>
             </a:r>
-            <a:endParaRPr lang="en-US"/>
           </a:p>
         </p:txBody>
       </p:sp>
@@ -2245,7 +2241,7 @@
           <a:p>
             <a:pPr lvl="0"/>
             <a:r>
-              <a:rPr lang="en-US" smtClean="0"/>
+              <a:rPr lang="en-US"/>
               <a:t>Click to edit Master text styles</a:t>
             </a:r>
           </a:p>
@@ -2268,7 +2264,7 @@
           <a:p>
             <a:fld id="{5BCAD085-E8A6-8845-BD4E-CB4CCA059FC4}" type="datetimeFigureOut">
               <a:rPr lang="en-US" smtClean="0"/>
-              <a:t>1/27/13</a:t>
+              <a:t>7/28/2026</a:t>
             </a:fld>
             <a:endParaRPr lang="en-US"/>
           </a:p>
@@ -2371,10 +2367,9 @@
           </a:lstStyle>
           <a:p>
             <a:r>
-              <a:rPr lang="en-US" smtClean="0"/>
+              <a:rPr lang="en-US"/>
               <a:t>Click to edit Master title style</a:t>
             </a:r>
-            <a:endParaRPr lang="en-US"/>
           </a:p>
         </p:txBody>
       </p:sp>
@@ -2498,7 +2493,7 @@
           <a:p>
             <a:pPr lvl="0"/>
             <a:r>
-              <a:rPr lang="en-US" smtClean="0"/>
+              <a:rPr lang="en-US"/>
               <a:t>Click to edit Master text styles</a:t>
             </a:r>
           </a:p>
@@ -2521,7 +2516,7 @@
           <a:p>
             <a:fld id="{5BCAD085-E8A6-8845-BD4E-CB4CCA059FC4}" type="datetimeFigureOut">
               <a:rPr lang="en-US" smtClean="0"/>
-              <a:t>1/27/13</a:t>
+              <a:t>7/28/2026</a:t>
             </a:fld>
             <a:endParaRPr lang="en-US"/>
           </a:p>
@@ -2630,10 +2625,9 @@
           <a:lstStyle/>
           <a:p>
             <a:r>
-              <a:rPr lang="en-US" smtClean="0"/>
+              <a:rPr lang="en-US"/>
               <a:t>Click to edit Master title style</a:t>
             </a:r>
-            <a:endParaRPr lang="en-US"/>
           </a:p>
         </p:txBody>
       </p:sp>
@@ -2664,38 +2658,37 @@
           <a:p>
             <a:pPr lvl="0"/>
             <a:r>
-              <a:rPr lang="en-US" smtClean="0"/>
+              <a:rPr lang="en-US"/>
               <a:t>Click to edit Master text styles</a:t>
             </a:r>
           </a:p>
           <a:p>
             <a:pPr lvl="1"/>
             <a:r>
-              <a:rPr lang="en-US" smtClean="0"/>
+              <a:rPr lang="en-US"/>
               <a:t>Second level</a:t>
             </a:r>
           </a:p>
           <a:p>
             <a:pPr lvl="2"/>
             <a:r>
-              <a:rPr lang="en-US" smtClean="0"/>
+              <a:rPr lang="en-US"/>
               <a:t>Third level</a:t>
             </a:r>
           </a:p>
           <a:p>
             <a:pPr lvl="3"/>
             <a:r>
-              <a:rPr lang="en-US" smtClean="0"/>
+              <a:rPr lang="en-US"/>
               <a:t>Fourth level</a:t>
             </a:r>
           </a:p>
           <a:p>
             <a:pPr lvl="4"/>
             <a:r>
-              <a:rPr lang="en-US" smtClean="0"/>
+              <a:rPr lang="en-US"/>
               <a:t>Fifth level</a:t>
             </a:r>
-            <a:endParaRPr lang="en-US"/>
           </a:p>
         </p:txBody>
       </p:sp>
@@ -2734,7 +2727,7 @@
           <a:p>
             <a:fld id="{5BCAD085-E8A6-8845-BD4E-CB4CCA059FC4}" type="datetimeFigureOut">
               <a:rPr lang="en-US" smtClean="0"/>
-              <a:t>1/27/13</a:t>
+              <a:t>7/28/2026</a:t>
             </a:fld>
             <a:endParaRPr lang="en-US"/>
           </a:p>
@@ -3093,7 +3086,7 @@
 </file>
 
 <file path=ppt/slides/slide1.xml><?xml version="1.0" encoding="utf-8"?>
-<p:sld xmlns:a="http://schemas.openxmlformats.org/drawingml/2006/main" xmlns:p="http://schemas.openxmlformats.org/presentationml/2006/main" xmlns:r="http://schemas.openxmlformats.org/officeDocument/2006/relationships">
+<p:sld xmlns:a="http://schemas.openxmlformats.org/drawingml/2006/main" xmlns:r="http://schemas.openxmlformats.org/officeDocument/2006/relationships" xmlns:p="http://schemas.openxmlformats.org/presentationml/2006/main">
   <p:cSld>
     <p:spTree>
       <p:nvGrpSpPr>
@@ -3101,7 +3094,14 @@
         <p:cNvGrpSpPr/>
         <p:nvPr/>
       </p:nvGrpSpPr>
-      <p:grpSpPr/>
+      <p:grpSpPr>
+        <a:xfrm>
+          <a:off x="0" y="0"/>
+          <a:ext cx="0" cy="0"/>
+          <a:chOff x="0" y="0"/>
+          <a:chExt cx="0" cy="0"/>
+        </a:xfrm>
+      </p:grpSpPr>
       <p:sp>
         <p:nvSpPr>
           <p:cNvPr id="2" name="Rectangle 1"/>
@@ -3117,7 +3117,7 @@
             <a:avLst/>
           </a:prstGeom>
           <a:solidFill>
-            <a:srgbClr val="86318E"/>
+            <a:srgbClr val="FFFFFF"/>
           </a:solidFill>
           <a:ln>
             <a:noFill/>
@@ -3142,6 +3142,7 @@
           <a:lstStyle/>
           <a:p>
             <a:pPr algn="ctr"/>
+            <a:endParaRPr/>
           </a:p>
         </p:txBody>
       </p:sp>
@@ -3153,8 +3154,8 @@
         </p:nvSpPr>
         <p:spPr>
           <a:xfrm>
-            <a:off x="914400" y="1828800"/>
-            <a:ext cx="10332720" cy="365760"/>
+            <a:off x="548640" y="365760"/>
+            <a:ext cx="10972800" cy="365760"/>
           </a:xfrm>
           <a:prstGeom prst="rect">
             <a:avLst/>
@@ -3162,13 +3163,13 @@
           <a:noFill/>
         </p:spPr>
         <p:txBody>
-          <a:bodyPr wrap="none">
+          <a:bodyPr wrap="square" lIns="0" tIns="0" rIns="0" bIns="0">
             <a:spAutoFit/>
           </a:bodyPr>
           <a:lstStyle/>
           <a:p>
             <a:pPr>
-              <a:defRPr sz="1100" b="1">
+              <a:defRPr sz="950" b="1">
                 <a:solidFill>
                   <a:srgbClr val="0D9488"/>
                 </a:solidFill>
@@ -3176,7 +3177,7 @@
               </a:defRPr>
             </a:pPr>
             <a:r>
-              <a:t>EKINOX INSURANCE PLATFORM</a:t>
+              <a:t>FRAUD INTELLIGENCE ACCELERATOR</a:t>
             </a:r>
           </a:p>
         </p:txBody>
@@ -3189,8 +3190,8 @@
         </p:nvSpPr>
         <p:spPr>
           <a:xfrm>
-            <a:off x="914400" y="2194560"/>
-            <a:ext cx="10332720" cy="1645920"/>
+            <a:off x="548640" y="640080"/>
+            <a:ext cx="10972800" cy="640080"/>
           </a:xfrm>
           <a:prstGeom prst="rect">
             <a:avLst/>
@@ -3198,35 +3199,79 @@
           <a:noFill/>
         </p:spPr>
         <p:txBody>
-          <a:bodyPr wrap="square">
+          <a:bodyPr wrap="square" lIns="0" tIns="0" rIns="0" bIns="0">
             <a:spAutoFit/>
           </a:bodyPr>
           <a:lstStyle/>
           <a:p>
             <a:pPr>
-              <a:defRPr sz="4000" b="1">
-                <a:solidFill>
-                  <a:srgbClr val="FFFFFF"/>
+              <a:defRPr sz="2400" b="1">
+                <a:solidFill>
+                  <a:srgbClr val="86318E"/>
                 </a:solidFill>
                 <a:latin typeface="Arial"/>
               </a:defRPr>
             </a:pPr>
             <a:r>
-              <a:t>Fraud Intelligence Accelerator</a:t>
-            </a:r>
-          </a:p>
-        </p:txBody>
-      </p:sp>
-      <p:sp>
-        <p:nvSpPr>
-          <p:cNvPr id="5" name="TextBox 4"/>
+              <a:t>1. Alignement Stratégique &amp; Positionnement</a:t>
+            </a:r>
+          </a:p>
+        </p:txBody>
+      </p:sp>
+      <p:sp>
+        <p:nvSpPr>
+          <p:cNvPr id="5" name="Rectangle 4"/>
+          <p:cNvSpPr/>
+          <p:nvPr/>
+        </p:nvSpPr>
+        <p:spPr>
+          <a:xfrm>
+            <a:off x="548640" y="1280160"/>
+            <a:ext cx="11094415" cy="18288"/>
+          </a:xfrm>
+          <a:prstGeom prst="rect">
+            <a:avLst/>
+          </a:prstGeom>
+          <a:solidFill>
+            <a:srgbClr val="E5E7EB"/>
+          </a:solidFill>
+          <a:ln>
+            <a:noFill/>
+          </a:ln>
+        </p:spPr>
+        <p:style>
+          <a:lnRef idx="1">
+            <a:schemeClr val="accent1"/>
+          </a:lnRef>
+          <a:fillRef idx="3">
+            <a:schemeClr val="accent1"/>
+          </a:fillRef>
+          <a:effectRef idx="2">
+            <a:schemeClr val="accent1"/>
+          </a:effectRef>
+          <a:fontRef idx="minor">
+            <a:schemeClr val="lt1"/>
+          </a:fontRef>
+        </p:style>
+        <p:txBody>
+          <a:bodyPr rtlCol="0" anchor="ctr"/>
+          <a:lstStyle/>
+          <a:p>
+            <a:pPr algn="ctr"/>
+            <a:endParaRPr/>
+          </a:p>
+        </p:txBody>
+      </p:sp>
+      <p:sp>
+        <p:nvSpPr>
+          <p:cNvPr id="6" name="TextBox 5"/>
           <p:cNvSpPr txBox="1"/>
           <p:nvPr/>
         </p:nvSpPr>
         <p:spPr>
           <a:xfrm>
-            <a:off x="914400" y="3840480"/>
-            <a:ext cx="10332720" cy="731520"/>
+            <a:off x="548640" y="6400800"/>
+            <a:ext cx="11094415" cy="274320"/>
           </a:xfrm>
           <a:prstGeom prst="rect">
             <a:avLst/>
@@ -3234,35 +3279,142 @@
           <a:noFill/>
         </p:spPr>
         <p:txBody>
-          <a:bodyPr wrap="square">
+          <a:bodyPr wrap="none" lIns="0" tIns="0" rIns="0" bIns="0">
             <a:spAutoFit/>
           </a:bodyPr>
           <a:lstStyle/>
           <a:p>
-            <a:pPr>
-              <a:defRPr sz="1600" i="1">
-                <a:solidFill>
-                  <a:srgbClr val="F9FAFB"/>
+            <a:pPr algn="r">
+              <a:defRPr sz="850">
+                <a:solidFill>
+                  <a:srgbClr val="6B7280"/>
                 </a:solidFill>
                 <a:latin typeface="Arial"/>
               </a:defRPr>
             </a:pPr>
             <a:r>
-              <a:t>Sécuriser la sinistralité et réduire le Loss Ratio via une plateforme de détection intégrée</a:t>
-            </a:r>
-          </a:p>
-        </p:txBody>
-      </p:sp>
-      <p:sp>
-        <p:nvSpPr>
-          <p:cNvPr id="6" name="Rectangle 5"/>
+              <a:t>Ekinox Consulting  |  Proposition de Transformation  |  Confidentialité SanlamAllianz  |  Slide 2</a:t>
+            </a:r>
+          </a:p>
+        </p:txBody>
+      </p:sp>
+      <p:sp>
+        <p:nvSpPr>
+          <p:cNvPr id="7" name="TextBox 6"/>
+          <p:cNvSpPr txBox="1"/>
+          <p:nvPr/>
+        </p:nvSpPr>
+        <p:spPr>
+          <a:xfrm>
+            <a:off x="548640" y="1645920"/>
+            <a:ext cx="5303520" cy="4114800"/>
+          </a:xfrm>
+          <a:prstGeom prst="rect">
+            <a:avLst/>
+          </a:prstGeom>
+          <a:noFill/>
+        </p:spPr>
+        <p:txBody>
+          <a:bodyPr wrap="square" lIns="0" tIns="0" rIns="0" bIns="0">
+            <a:spAutoFit/>
+          </a:bodyPr>
+          <a:lstStyle/>
+          <a:p>
+            <a:pPr>
+              <a:lnSpc>
+                <a:spcPct val="120000"/>
+              </a:lnSpc>
+              <a:spcAft>
+                <a:spcPts val="1400"/>
+              </a:spcAft>
+              <a:defRPr sz="1300">
+                <a:solidFill>
+                  <a:srgbClr val="1F2937"/>
+                </a:solidFill>
+                <a:latin typeface="Arial"/>
+              </a:defRPr>
+            </a:pPr>
+            <a:r>
+              <a:t>La maîtrise du loss ratio est le premier levier de rentabilité technique de SanlamAllianz.</a:t>
+            </a:r>
+          </a:p>
+          <a:p>
+            <a:pPr>
+              <a:lnSpc>
+                <a:spcPct val="120000"/>
+              </a:lnSpc>
+              <a:spcAft>
+                <a:spcPts val="1400"/>
+              </a:spcAft>
+              <a:defRPr sz="1300">
+                <a:solidFill>
+                  <a:srgbClr val="1F2937"/>
+                </a:solidFill>
+                <a:latin typeface="Arial"/>
+              </a:defRPr>
+            </a:pPr>
+            <a:r>
+              <a:t>La Fraud Intelligence Platform permet de systématiser la détection des anomalies, d'optimiser le temps des enquêteurs via des alertes explicitables, et d'organiser la capitalisation continue des nouveaux modus operandi.</a:t>
+            </a:r>
+          </a:p>
+        </p:txBody>
+      </p:sp>
+      <p:sp>
+        <p:nvSpPr>
+          <p:cNvPr id="8" name="Rectangle 7"/>
           <p:cNvSpPr/>
           <p:nvPr/>
         </p:nvSpPr>
         <p:spPr>
           <a:xfrm>
-            <a:off x="914400" y="4754880"/>
-            <a:ext cx="2743200" cy="54864"/>
+            <a:off x="6339535" y="1645920"/>
+            <a:ext cx="5303520" cy="1188720"/>
+          </a:xfrm>
+          <a:prstGeom prst="rect">
+            <a:avLst/>
+          </a:prstGeom>
+          <a:solidFill>
+            <a:srgbClr val="F9FAFB"/>
+          </a:solidFill>
+          <a:ln>
+            <a:solidFill>
+              <a:srgbClr val="E5E7EB"/>
+            </a:solidFill>
+          </a:ln>
+        </p:spPr>
+        <p:style>
+          <a:lnRef idx="1">
+            <a:schemeClr val="accent1"/>
+          </a:lnRef>
+          <a:fillRef idx="3">
+            <a:schemeClr val="accent1"/>
+          </a:fillRef>
+          <a:effectRef idx="2">
+            <a:schemeClr val="accent1"/>
+          </a:effectRef>
+          <a:fontRef idx="minor">
+            <a:schemeClr val="lt1"/>
+          </a:fontRef>
+        </p:style>
+        <p:txBody>
+          <a:bodyPr rtlCol="0" anchor="ctr"/>
+          <a:lstStyle/>
+          <a:p>
+            <a:pPr algn="ctr"/>
+            <a:endParaRPr/>
+          </a:p>
+        </p:txBody>
+      </p:sp>
+      <p:sp>
+        <p:nvSpPr>
+          <p:cNvPr id="9" name="Rectangle 8"/>
+          <p:cNvSpPr/>
+          <p:nvPr/>
+        </p:nvSpPr>
+        <p:spPr>
+          <a:xfrm>
+            <a:off x="6339535" y="1645920"/>
+            <a:ext cx="64008" cy="1188720"/>
           </a:xfrm>
           <a:prstGeom prst="rect">
             <a:avLst/>
@@ -3293,19 +3445,20 @@
           <a:lstStyle/>
           <a:p>
             <a:pPr algn="ctr"/>
-          </a:p>
-        </p:txBody>
-      </p:sp>
-      <p:sp>
-        <p:nvSpPr>
-          <p:cNvPr id="7" name="TextBox 6"/>
+            <a:endParaRPr/>
+          </a:p>
+        </p:txBody>
+      </p:sp>
+      <p:sp>
+        <p:nvSpPr>
+          <p:cNvPr id="10" name="TextBox 9"/>
           <p:cNvSpPr txBox="1"/>
           <p:nvPr/>
         </p:nvSpPr>
         <p:spPr>
           <a:xfrm>
-            <a:off x="914400" y="5303520"/>
-            <a:ext cx="10332720" cy="914400"/>
+            <a:off x="6537960" y="1783080"/>
+            <a:ext cx="4937760" cy="914400"/>
           </a:xfrm>
           <a:prstGeom prst="rect">
             <a:avLst/>
@@ -3313,25 +3466,330 @@
           <a:noFill/>
         </p:spPr>
         <p:txBody>
-          <a:bodyPr wrap="none">
+          <a:bodyPr wrap="square">
             <a:spAutoFit/>
           </a:bodyPr>
           <a:lstStyle/>
           <a:p>
             <a:pPr>
-              <a:defRPr sz="1100">
-                <a:solidFill>
-                  <a:srgbClr val="F9FAFB"/>
+              <a:spcAft>
+                <a:spcPts val="400"/>
+              </a:spcAft>
+              <a:defRPr sz="1100" b="1">
+                <a:solidFill>
+                  <a:srgbClr val="86318E"/>
+                </a:solidFill>
+                <a:latin typeface="Arial"/>
+              </a:defRPr>
+            </a:pPr>
+            <a:r>
+              <a:t>DÉTECTION PRÉCOCE</a:t>
+            </a:r>
+          </a:p>
+          <a:p>
+            <a:pPr>
+              <a:lnSpc>
+                <a:spcPct val="110000"/>
+              </a:lnSpc>
+              <a:defRPr sz="1000">
+                <a:solidFill>
+                  <a:srgbClr val="1F2937"/>
                 </a:solidFill>
                 <a:latin typeface="Calibri"/>
               </a:defRPr>
             </a:pPr>
             <a:r>
-              <a:t>Destinataire : COMEX SanlamAllianz Group</a:t>
-            </a:r>
-            <a:br/>
-            <a:r>
-              <a:t>Date : Juillet 2026  |  Statut : STRICTEMENT CONFIDENTIEL</a:t>
+              <a:t>Fast-track des dossiers sains et priorisation automatique des alertes suspectes selon leur montant financier.</a:t>
+            </a:r>
+          </a:p>
+        </p:txBody>
+      </p:sp>
+      <p:sp>
+        <p:nvSpPr>
+          <p:cNvPr id="11" name="Rectangle 10"/>
+          <p:cNvSpPr/>
+          <p:nvPr/>
+        </p:nvSpPr>
+        <p:spPr>
+          <a:xfrm>
+            <a:off x="6339535" y="3108960"/>
+            <a:ext cx="5303520" cy="1188720"/>
+          </a:xfrm>
+          <a:prstGeom prst="rect">
+            <a:avLst/>
+          </a:prstGeom>
+          <a:solidFill>
+            <a:srgbClr val="F9FAFB"/>
+          </a:solidFill>
+          <a:ln>
+            <a:solidFill>
+              <a:srgbClr val="E5E7EB"/>
+            </a:solidFill>
+          </a:ln>
+        </p:spPr>
+        <p:style>
+          <a:lnRef idx="1">
+            <a:schemeClr val="accent1"/>
+          </a:lnRef>
+          <a:fillRef idx="3">
+            <a:schemeClr val="accent1"/>
+          </a:fillRef>
+          <a:effectRef idx="2">
+            <a:schemeClr val="accent1"/>
+          </a:effectRef>
+          <a:fontRef idx="minor">
+            <a:schemeClr val="lt1"/>
+          </a:fontRef>
+        </p:style>
+        <p:txBody>
+          <a:bodyPr rtlCol="0" anchor="ctr"/>
+          <a:lstStyle/>
+          <a:p>
+            <a:pPr algn="ctr"/>
+            <a:endParaRPr/>
+          </a:p>
+        </p:txBody>
+      </p:sp>
+      <p:sp>
+        <p:nvSpPr>
+          <p:cNvPr id="12" name="Rectangle 11"/>
+          <p:cNvSpPr/>
+          <p:nvPr/>
+        </p:nvSpPr>
+        <p:spPr>
+          <a:xfrm>
+            <a:off x="6339535" y="3108960"/>
+            <a:ext cx="64008" cy="1188720"/>
+          </a:xfrm>
+          <a:prstGeom prst="rect">
+            <a:avLst/>
+          </a:prstGeom>
+          <a:solidFill>
+            <a:srgbClr val="0D9488"/>
+          </a:solidFill>
+          <a:ln>
+            <a:noFill/>
+          </a:ln>
+        </p:spPr>
+        <p:style>
+          <a:lnRef idx="1">
+            <a:schemeClr val="accent1"/>
+          </a:lnRef>
+          <a:fillRef idx="3">
+            <a:schemeClr val="accent1"/>
+          </a:fillRef>
+          <a:effectRef idx="2">
+            <a:schemeClr val="accent1"/>
+          </a:effectRef>
+          <a:fontRef idx="minor">
+            <a:schemeClr val="lt1"/>
+          </a:fontRef>
+        </p:style>
+        <p:txBody>
+          <a:bodyPr rtlCol="0" anchor="ctr"/>
+          <a:lstStyle/>
+          <a:p>
+            <a:pPr algn="ctr"/>
+            <a:endParaRPr/>
+          </a:p>
+        </p:txBody>
+      </p:sp>
+      <p:sp>
+        <p:nvSpPr>
+          <p:cNvPr id="13" name="TextBox 12"/>
+          <p:cNvSpPr txBox="1"/>
+          <p:nvPr/>
+        </p:nvSpPr>
+        <p:spPr>
+          <a:xfrm>
+            <a:off x="6537960" y="3246120"/>
+            <a:ext cx="4937760" cy="914400"/>
+          </a:xfrm>
+          <a:prstGeom prst="rect">
+            <a:avLst/>
+          </a:prstGeom>
+          <a:noFill/>
+        </p:spPr>
+        <p:txBody>
+          <a:bodyPr wrap="square">
+            <a:spAutoFit/>
+          </a:bodyPr>
+          <a:lstStyle/>
+          <a:p>
+            <a:pPr>
+              <a:spcAft>
+                <a:spcPts val="400"/>
+              </a:spcAft>
+              <a:defRPr sz="1100" b="1">
+                <a:solidFill>
+                  <a:srgbClr val="86318E"/>
+                </a:solidFill>
+                <a:latin typeface="Arial"/>
+              </a:defRPr>
+            </a:pPr>
+            <a:r>
+              <a:t>EXPLICABILITÉ (EXPLAINABLE AI)</a:t>
+            </a:r>
+          </a:p>
+          <a:p>
+            <a:pPr>
+              <a:lnSpc>
+                <a:spcPct val="110000"/>
+              </a:lnSpc>
+              <a:defRPr sz="1000">
+                <a:solidFill>
+                  <a:srgbClr val="1F2937"/>
+                </a:solidFill>
+                <a:latin typeface="Calibri"/>
+              </a:defRPr>
+            </a:pPr>
+            <a:r>
+              <a:t>Justification textuelle claire de chaque score de fraude pour accompagner la décision humaine.</a:t>
+            </a:r>
+          </a:p>
+        </p:txBody>
+      </p:sp>
+      <p:sp>
+        <p:nvSpPr>
+          <p:cNvPr id="14" name="Rectangle 13"/>
+          <p:cNvSpPr/>
+          <p:nvPr/>
+        </p:nvSpPr>
+        <p:spPr>
+          <a:xfrm>
+            <a:off x="6339535" y="4572000"/>
+            <a:ext cx="5303520" cy="1188720"/>
+          </a:xfrm>
+          <a:prstGeom prst="rect">
+            <a:avLst/>
+          </a:prstGeom>
+          <a:solidFill>
+            <a:srgbClr val="F9FAFB"/>
+          </a:solidFill>
+          <a:ln>
+            <a:solidFill>
+              <a:srgbClr val="E5E7EB"/>
+            </a:solidFill>
+          </a:ln>
+        </p:spPr>
+        <p:style>
+          <a:lnRef idx="1">
+            <a:schemeClr val="accent1"/>
+          </a:lnRef>
+          <a:fillRef idx="3">
+            <a:schemeClr val="accent1"/>
+          </a:fillRef>
+          <a:effectRef idx="2">
+            <a:schemeClr val="accent1"/>
+          </a:effectRef>
+          <a:fontRef idx="minor">
+            <a:schemeClr val="lt1"/>
+          </a:fontRef>
+        </p:style>
+        <p:txBody>
+          <a:bodyPr rtlCol="0" anchor="ctr"/>
+          <a:lstStyle/>
+          <a:p>
+            <a:pPr algn="ctr"/>
+            <a:endParaRPr/>
+          </a:p>
+        </p:txBody>
+      </p:sp>
+      <p:sp>
+        <p:nvSpPr>
+          <p:cNvPr id="15" name="Rectangle 14"/>
+          <p:cNvSpPr/>
+          <p:nvPr/>
+        </p:nvSpPr>
+        <p:spPr>
+          <a:xfrm>
+            <a:off x="6339535" y="4572000"/>
+            <a:ext cx="64008" cy="1188720"/>
+          </a:xfrm>
+          <a:prstGeom prst="rect">
+            <a:avLst/>
+          </a:prstGeom>
+          <a:solidFill>
+            <a:srgbClr val="0D9488"/>
+          </a:solidFill>
+          <a:ln>
+            <a:noFill/>
+          </a:ln>
+        </p:spPr>
+        <p:style>
+          <a:lnRef idx="1">
+            <a:schemeClr val="accent1"/>
+          </a:lnRef>
+          <a:fillRef idx="3">
+            <a:schemeClr val="accent1"/>
+          </a:fillRef>
+          <a:effectRef idx="2">
+            <a:schemeClr val="accent1"/>
+          </a:effectRef>
+          <a:fontRef idx="minor">
+            <a:schemeClr val="lt1"/>
+          </a:fontRef>
+        </p:style>
+        <p:txBody>
+          <a:bodyPr rtlCol="0" anchor="ctr"/>
+          <a:lstStyle/>
+          <a:p>
+            <a:pPr algn="ctr"/>
+            <a:endParaRPr/>
+          </a:p>
+        </p:txBody>
+      </p:sp>
+      <p:sp>
+        <p:nvSpPr>
+          <p:cNvPr id="16" name="TextBox 15"/>
+          <p:cNvSpPr txBox="1"/>
+          <p:nvPr/>
+        </p:nvSpPr>
+        <p:spPr>
+          <a:xfrm>
+            <a:off x="6537960" y="4709160"/>
+            <a:ext cx="4937760" cy="914400"/>
+          </a:xfrm>
+          <a:prstGeom prst="rect">
+            <a:avLst/>
+          </a:prstGeom>
+          <a:noFill/>
+        </p:spPr>
+        <p:txBody>
+          <a:bodyPr wrap="square">
+            <a:spAutoFit/>
+          </a:bodyPr>
+          <a:lstStyle/>
+          <a:p>
+            <a:pPr>
+              <a:spcAft>
+                <a:spcPts val="400"/>
+              </a:spcAft>
+              <a:defRPr sz="1100" b="1">
+                <a:solidFill>
+                  <a:srgbClr val="86318E"/>
+                </a:solidFill>
+                <a:latin typeface="Arial"/>
+              </a:defRPr>
+            </a:pPr>
+            <a:r>
+              <a:t>BOUCLE DE CAPITALISATION</a:t>
+            </a:r>
+          </a:p>
+          <a:p>
+            <a:pPr>
+              <a:lnSpc>
+                <a:spcPct val="110000"/>
+              </a:lnSpc>
+              <a:defRPr sz="1000">
+                <a:solidFill>
+                  <a:srgbClr val="1F2937"/>
+                </a:solidFill>
+                <a:latin typeface="Calibri"/>
+              </a:defRPr>
+            </a:pPr>
+            <a:r>
+              <a:t>Chaque dossier résolu enrichit automatiquement le moteur de règles pour améliorer les futures détections.</a:t>
             </a:r>
           </a:p>
         </p:txBody>
@@ -3345,7 +3803,7 @@
 </file>
 
 <file path=ppt/slides/slide10.xml><?xml version="1.0" encoding="utf-8"?>
-<p:sld xmlns:a="http://schemas.openxmlformats.org/drawingml/2006/main" xmlns:p="http://schemas.openxmlformats.org/presentationml/2006/main" xmlns:r="http://schemas.openxmlformats.org/officeDocument/2006/relationships">
+<p:sld xmlns:a="http://schemas.openxmlformats.org/drawingml/2006/main" xmlns:r="http://schemas.openxmlformats.org/officeDocument/2006/relationships" xmlns:p="http://schemas.openxmlformats.org/presentationml/2006/main">
   <p:cSld>
     <p:spTree>
       <p:nvGrpSpPr>
@@ -3353,7 +3811,14 @@
         <p:cNvGrpSpPr/>
         <p:nvPr/>
       </p:nvGrpSpPr>
-      <p:grpSpPr/>
+      <p:grpSpPr>
+        <a:xfrm>
+          <a:off x="0" y="0"/>
+          <a:ext cx="0" cy="0"/>
+          <a:chOff x="0" y="0"/>
+          <a:chExt cx="0" cy="0"/>
+        </a:xfrm>
+      </p:grpSpPr>
       <p:sp>
         <p:nvSpPr>
           <p:cNvPr id="2" name="Rectangle 1"/>
@@ -3394,6 +3859,7 @@
           <a:lstStyle/>
           <a:p>
             <a:pPr algn="ctr"/>
+            <a:endParaRPr/>
           </a:p>
         </p:txBody>
       </p:sp>
@@ -3414,7 +3880,7 @@
           <a:noFill/>
         </p:spPr>
         <p:txBody>
-          <a:bodyPr wrap="square" lIns="0" tIns="0" bIns="0" rIns="0">
+          <a:bodyPr wrap="square" lIns="0" tIns="0" rIns="0" bIns="0">
             <a:spAutoFit/>
           </a:bodyPr>
           <a:lstStyle/>
@@ -3450,7 +3916,7 @@
           <a:noFill/>
         </p:spPr>
         <p:txBody>
-          <a:bodyPr wrap="square" lIns="0" tIns="0" bIns="0" rIns="0">
+          <a:bodyPr wrap="square" lIns="0" tIns="0" rIns="0" bIns="0">
             <a:spAutoFit/>
           </a:bodyPr>
           <a:lstStyle/>
@@ -3464,7 +3930,7 @@
               </a:defRPr>
             </a:pPr>
             <a:r>
-              <a:t>4.6 Capacité : Case Prioritization</a:t>
+              <a:t>4.7 Capacité : Investigation Cockpit</a:t>
             </a:r>
           </a:p>
         </p:txBody>
@@ -3509,6 +3975,7 @@
           <a:lstStyle/>
           <a:p>
             <a:pPr algn="ctr"/>
+            <a:endParaRPr/>
           </a:p>
         </p:txBody>
       </p:sp>
@@ -3529,7 +3996,7 @@
           <a:noFill/>
         </p:spPr>
         <p:txBody>
-          <a:bodyPr wrap="none" lIns="0" tIns="0" bIns="0" rIns="0">
+          <a:bodyPr wrap="none" lIns="0" tIns="0" rIns="0" bIns="0">
             <a:spAutoFit/>
           </a:bodyPr>
           <a:lstStyle/>
@@ -3543,7 +4010,7 @@
               </a:defRPr>
             </a:pPr>
             <a:r>
-              <a:t>Ekinox Consulting  |  Proposition de Transformation  |  Confidentialité SanlamAllianz  |  Slide 10</a:t>
+              <a:t>Ekinox Consulting  |  Proposition de Transformation  |  Confidentialité SanlamAllianz  |  Slide 11</a:t>
             </a:r>
           </a:p>
         </p:txBody>
@@ -3590,6 +4057,7 @@
           <a:lstStyle/>
           <a:p>
             <a:pPr algn="ctr"/>
+            <a:endParaRPr/>
           </a:p>
         </p:txBody>
       </p:sp>
@@ -3633,6 +4101,7 @@
           <a:lstStyle/>
           <a:p>
             <a:pPr algn="ctr"/>
+            <a:endParaRPr/>
           </a:p>
         </p:txBody>
       </p:sp>
@@ -3693,7 +4162,7 @@
             </a:r>
             <a:br/>
             <a:r>
-              <a:t>Allouer le temps des experts là où l'enjeu financier est maximal.</a:t>
+              <a:t>Le pilotage stratégique de la lutte anti-fraude en temps réel.</a:t>
             </a:r>
           </a:p>
           <a:p>
@@ -3716,7 +4185,7 @@
             </a:r>
             <a:br/>
             <a:r>
-              <a:t>Trie automatiquement la file de travail des investigateurs selon la probabilité de fraude et l'enjeu financier du sinistre.</a:t>
+              <a:t>Fournit des indicateurs de performance (KPIs) sur les dossiers traités, les montants sauvés et l'efficacité des équipes.</a:t>
             </a:r>
           </a:p>
           <a:p>
@@ -3739,7 +4208,7 @@
             </a:r>
             <a:br/>
             <a:r>
-              <a:t>En début de journée, le gestionnaire voit en haut de sa liste un dossier suspect d'incendie estimé à 50 000€, avant les petits accrochages.</a:t>
+              <a:t>Le directeur indemnisation visualise qu'en un mois, l'outil a permis d'économiser 200 000€ sur les sinistres automobiles.</a:t>
             </a:r>
           </a:p>
           <a:p>
@@ -3762,7 +4231,7 @@
             </a:r>
             <a:br/>
             <a:r>
-              <a:t>Optimisation drastique du Retour sur Investissement du temps passé par les équipes de contrôle.</a:t>
+              <a:t>Visibilité totale sur le ROI de la plateforme et facilitation du reporting à la direction générale.</a:t>
             </a:r>
           </a:p>
         </p:txBody>
@@ -3809,6 +4278,7 @@
           <a:lstStyle/>
           <a:p>
             <a:pPr algn="ctr"/>
+            <a:endParaRPr/>
           </a:p>
         </p:txBody>
       </p:sp>
@@ -3852,6 +4322,7 @@
           <a:lstStyle/>
           <a:p>
             <a:pPr algn="ctr"/>
+            <a:endParaRPr/>
           </a:p>
         </p:txBody>
       </p:sp>
@@ -3912,7 +4383,7 @@
             </a:r>
             <a:br/>
             <a:r>
-              <a:t>Montant estimé du sinistre, score de probabilité de fraude.</a:t>
+              <a:t>Statuts de clôture des dossiers suspects, montants initiaux provisionnés vs montants payés réels.</a:t>
             </a:r>
           </a:p>
           <a:p>
@@ -3935,7 +4406,7 @@
             </a:r>
             <a:br/>
             <a:r>
-              <a:t>File de traitement priorisée, algorithmes de tri dynamiques.</a:t>
+              <a:t>Module de Business Intelligence basique, tableaux de bord de reporting.</a:t>
             </a:r>
           </a:p>
           <a:p>
@@ -3958,7 +4429,7 @@
             </a:r>
             <a:br/>
             <a:r>
-              <a:t>API de récupération de la liste de travail ordonnée.</a:t>
+              <a:t>API d'agrégation de métriques globales.</a:t>
             </a:r>
           </a:p>
           <a:p>
@@ -3981,7 +4452,7 @@
             </a:r>
             <a:br/>
             <a:r>
-              <a:t>Définition de la matrice criticité/probabilité, implémentation du système de tri dans le Workspace.</a:t>
+              <a:t>Définition des KPIs clés, développement des graphiques de synthèse (taux de détection, montants économisés).</a:t>
             </a:r>
           </a:p>
         </p:txBody>
@@ -3995,7 +4466,7 @@
 </file>
 
 <file path=ppt/slides/slide11.xml><?xml version="1.0" encoding="utf-8"?>
-<p:sld xmlns:a="http://schemas.openxmlformats.org/drawingml/2006/main" xmlns:p="http://schemas.openxmlformats.org/presentationml/2006/main" xmlns:r="http://schemas.openxmlformats.org/officeDocument/2006/relationships">
+<p:sld xmlns:a="http://schemas.openxmlformats.org/drawingml/2006/main" xmlns:r="http://schemas.openxmlformats.org/officeDocument/2006/relationships" xmlns:p="http://schemas.openxmlformats.org/presentationml/2006/main">
   <p:cSld>
     <p:spTree>
       <p:nvGrpSpPr>
@@ -4003,7 +4474,14 @@
         <p:cNvGrpSpPr/>
         <p:nvPr/>
       </p:nvGrpSpPr>
-      <p:grpSpPr/>
+      <p:grpSpPr>
+        <a:xfrm>
+          <a:off x="0" y="0"/>
+          <a:ext cx="0" cy="0"/>
+          <a:chOff x="0" y="0"/>
+          <a:chExt cx="0" cy="0"/>
+        </a:xfrm>
+      </p:grpSpPr>
       <p:sp>
         <p:nvSpPr>
           <p:cNvPr id="2" name="Rectangle 1"/>
@@ -4044,6 +4522,7 @@
           <a:lstStyle/>
           <a:p>
             <a:pPr algn="ctr"/>
+            <a:endParaRPr/>
           </a:p>
         </p:txBody>
       </p:sp>
@@ -4064,7 +4543,7 @@
           <a:noFill/>
         </p:spPr>
         <p:txBody>
-          <a:bodyPr wrap="square" lIns="0" tIns="0" bIns="0" rIns="0">
+          <a:bodyPr wrap="square" lIns="0" tIns="0" rIns="0" bIns="0">
             <a:spAutoFit/>
           </a:bodyPr>
           <a:lstStyle/>
@@ -4100,7 +4579,7 @@
           <a:noFill/>
         </p:spPr>
         <p:txBody>
-          <a:bodyPr wrap="square" lIns="0" tIns="0" bIns="0" rIns="0">
+          <a:bodyPr wrap="square" lIns="0" tIns="0" rIns="0" bIns="0">
             <a:spAutoFit/>
           </a:bodyPr>
           <a:lstStyle/>
@@ -4114,7 +4593,7 @@
               </a:defRPr>
             </a:pPr>
             <a:r>
-              <a:t>4.7 Capacité : Investigation Cockpit</a:t>
+              <a:t>5. Roadmap Produit &amp; Boucle de Capitalisation</a:t>
             </a:r>
           </a:p>
         </p:txBody>
@@ -4159,6 +4638,7 @@
           <a:lstStyle/>
           <a:p>
             <a:pPr algn="ctr"/>
+            <a:endParaRPr/>
           </a:p>
         </p:txBody>
       </p:sp>
@@ -4179,657 +4659,7 @@
           <a:noFill/>
         </p:spPr>
         <p:txBody>
-          <a:bodyPr wrap="none" lIns="0" tIns="0" bIns="0" rIns="0">
-            <a:spAutoFit/>
-          </a:bodyPr>
-          <a:lstStyle/>
-          <a:p>
-            <a:pPr algn="r">
-              <a:defRPr sz="850">
-                <a:solidFill>
-                  <a:srgbClr val="6B7280"/>
-                </a:solidFill>
-                <a:latin typeface="Arial"/>
-              </a:defRPr>
-            </a:pPr>
-            <a:r>
-              <a:t>Ekinox Consulting  |  Proposition de Transformation  |  Confidentialité SanlamAllianz  |  Slide 11</a:t>
-            </a:r>
-          </a:p>
-        </p:txBody>
-      </p:sp>
-      <p:sp>
-        <p:nvSpPr>
-          <p:cNvPr id="7" name="Rectangle 6"/>
-          <p:cNvSpPr/>
-          <p:nvPr/>
-        </p:nvSpPr>
-        <p:spPr>
-          <a:xfrm>
-            <a:off x="548640" y="1645920"/>
-            <a:ext cx="5303520" cy="4389120"/>
-          </a:xfrm>
-          <a:prstGeom prst="rect">
-            <a:avLst/>
-          </a:prstGeom>
-          <a:solidFill>
-            <a:srgbClr val="F9FAFB"/>
-          </a:solidFill>
-          <a:ln>
-            <a:solidFill>
-              <a:srgbClr val="E5E7EB"/>
-            </a:solidFill>
-          </a:ln>
-        </p:spPr>
-        <p:style>
-          <a:lnRef idx="1">
-            <a:schemeClr val="accent1"/>
-          </a:lnRef>
-          <a:fillRef idx="3">
-            <a:schemeClr val="accent1"/>
-          </a:fillRef>
-          <a:effectRef idx="2">
-            <a:schemeClr val="accent1"/>
-          </a:effectRef>
-          <a:fontRef idx="minor">
-            <a:schemeClr val="lt1"/>
-          </a:fontRef>
-        </p:style>
-        <p:txBody>
-          <a:bodyPr rtlCol="0" anchor="ctr"/>
-          <a:lstStyle/>
-          <a:p>
-            <a:pPr algn="ctr"/>
-          </a:p>
-        </p:txBody>
-      </p:sp>
-      <p:sp>
-        <p:nvSpPr>
-          <p:cNvPr id="8" name="Rectangle 7"/>
-          <p:cNvSpPr/>
-          <p:nvPr/>
-        </p:nvSpPr>
-        <p:spPr>
-          <a:xfrm>
-            <a:off x="548640" y="1645920"/>
-            <a:ext cx="73152" cy="4389120"/>
-          </a:xfrm>
-          <a:prstGeom prst="rect">
-            <a:avLst/>
-          </a:prstGeom>
-          <a:solidFill>
-            <a:srgbClr val="86318E"/>
-          </a:solidFill>
-          <a:ln>
-            <a:noFill/>
-          </a:ln>
-        </p:spPr>
-        <p:style>
-          <a:lnRef idx="1">
-            <a:schemeClr val="accent1"/>
-          </a:lnRef>
-          <a:fillRef idx="3">
-            <a:schemeClr val="accent1"/>
-          </a:fillRef>
-          <a:effectRef idx="2">
-            <a:schemeClr val="accent1"/>
-          </a:effectRef>
-          <a:fontRef idx="minor">
-            <a:schemeClr val="lt1"/>
-          </a:fontRef>
-        </p:style>
-        <p:txBody>
-          <a:bodyPr rtlCol="0" anchor="ctr"/>
-          <a:lstStyle/>
-          <a:p>
-            <a:pPr algn="ctr"/>
-          </a:p>
-        </p:txBody>
-      </p:sp>
-      <p:sp>
-        <p:nvSpPr>
-          <p:cNvPr id="9" name="TextBox 8"/>
-          <p:cNvSpPr txBox="1"/>
-          <p:nvPr/>
-        </p:nvSpPr>
-        <p:spPr>
-          <a:xfrm>
-            <a:off x="731520" y="1828800"/>
-            <a:ext cx="4937760" cy="4023360"/>
-          </a:xfrm>
-          <a:prstGeom prst="rect">
-            <a:avLst/>
-          </a:prstGeom>
-          <a:noFill/>
-        </p:spPr>
-        <p:txBody>
-          <a:bodyPr wrap="square">
-            <a:spAutoFit/>
-          </a:bodyPr>
-          <a:lstStyle/>
-          <a:p>
-            <a:pPr>
-              <a:spcAft>
-                <a:spcPts val="1400"/>
-              </a:spcAft>
-              <a:defRPr sz="1400" b="1">
-                <a:solidFill>
-                  <a:srgbClr val="86318E"/>
-                </a:solidFill>
-                <a:latin typeface="Arial"/>
-              </a:defRPr>
-            </a:pPr>
-            <a:r>
-              <a:t>CADRAGE CLIENT &amp; VALEUR MÉTIER</a:t>
-            </a:r>
-          </a:p>
-          <a:p>
-            <a:pPr>
-              <a:lnSpc>
-                <a:spcPct val="115000"/>
-              </a:lnSpc>
-              <a:spcAft>
-                <a:spcPts val="800"/>
-              </a:spcAft>
-              <a:defRPr sz="1100">
-                <a:solidFill>
-                  <a:srgbClr val="1F2937"/>
-                </a:solidFill>
-                <a:latin typeface="Calibri"/>
-              </a:defRPr>
-            </a:pPr>
-            <a:r>
-              <a:t>Vision &amp; Objectif :</a:t>
-            </a:r>
-            <a:br/>
-            <a:r>
-              <a:t>Le pilotage stratégique de la lutte anti-fraude en temps réel.</a:t>
-            </a:r>
-          </a:p>
-          <a:p>
-            <a:pPr>
-              <a:lnSpc>
-                <a:spcPct val="115000"/>
-              </a:lnSpc>
-              <a:spcAft>
-                <a:spcPts val="800"/>
-              </a:spcAft>
-              <a:defRPr sz="1100">
-                <a:solidFill>
-                  <a:srgbClr val="1F2937"/>
-                </a:solidFill>
-                <a:latin typeface="Calibri"/>
-              </a:defRPr>
-            </a:pPr>
-            <a:r>
-              <a:t>Valeur Métier :</a:t>
-            </a:r>
-            <a:br/>
-            <a:r>
-              <a:t>Fournit des indicateurs de performance (KPIs) sur les dossiers traités, les montants sauvés et l'efficacité des équipes.</a:t>
-            </a:r>
-          </a:p>
-          <a:p>
-            <a:pPr>
-              <a:lnSpc>
-                <a:spcPct val="115000"/>
-              </a:lnSpc>
-              <a:spcAft>
-                <a:spcPts val="800"/>
-              </a:spcAft>
-              <a:defRPr sz="1100">
-                <a:solidFill>
-                  <a:srgbClr val="1F2937"/>
-                </a:solidFill>
-                <a:latin typeface="Calibri"/>
-              </a:defRPr>
-            </a:pPr>
-            <a:r>
-              <a:t>Cas d'Usage Enquêteur :</a:t>
-            </a:r>
-            <a:br/>
-            <a:r>
-              <a:t>Le directeur indemnisation visualise qu'en un mois, l'outil a permis d'économiser 200 000€ sur les sinistres automobiles.</a:t>
-            </a:r>
-          </a:p>
-          <a:p>
-            <a:pPr>
-              <a:lnSpc>
-                <a:spcPct val="115000"/>
-              </a:lnSpc>
-              <a:spcAft>
-                <a:spcPts val="800"/>
-              </a:spcAft>
-              <a:defRPr sz="1100">
-                <a:solidFill>
-                  <a:srgbClr val="1F2937"/>
-                </a:solidFill>
-                <a:latin typeface="Calibri"/>
-              </a:defRPr>
-            </a:pPr>
-            <a:r>
-              <a:t>Impact Utilisateur :</a:t>
-            </a:r>
-            <a:br/>
-            <a:r>
-              <a:t>Visibilité totale sur le ROI de la plateforme et facilitation du reporting à la direction générale.</a:t>
-            </a:r>
-          </a:p>
-        </p:txBody>
-      </p:sp>
-      <p:sp>
-        <p:nvSpPr>
-          <p:cNvPr id="10" name="Rectangle 9"/>
-          <p:cNvSpPr/>
-          <p:nvPr/>
-        </p:nvSpPr>
-        <p:spPr>
-          <a:xfrm>
-            <a:off x="6339535" y="1645920"/>
-            <a:ext cx="5303520" cy="4389120"/>
-          </a:xfrm>
-          <a:prstGeom prst="rect">
-            <a:avLst/>
-          </a:prstGeom>
-          <a:solidFill>
-            <a:srgbClr val="F9FAFB"/>
-          </a:solidFill>
-          <a:ln>
-            <a:solidFill>
-              <a:srgbClr val="E5E7EB"/>
-            </a:solidFill>
-          </a:ln>
-        </p:spPr>
-        <p:style>
-          <a:lnRef idx="1">
-            <a:schemeClr val="accent1"/>
-          </a:lnRef>
-          <a:fillRef idx="3">
-            <a:schemeClr val="accent1"/>
-          </a:fillRef>
-          <a:effectRef idx="2">
-            <a:schemeClr val="accent1"/>
-          </a:effectRef>
-          <a:fontRef idx="minor">
-            <a:schemeClr val="lt1"/>
-          </a:fontRef>
-        </p:style>
-        <p:txBody>
-          <a:bodyPr rtlCol="0" anchor="ctr"/>
-          <a:lstStyle/>
-          <a:p>
-            <a:pPr algn="ctr"/>
-          </a:p>
-        </p:txBody>
-      </p:sp>
-      <p:sp>
-        <p:nvSpPr>
-          <p:cNvPr id="11" name="Rectangle 10"/>
-          <p:cNvSpPr/>
-          <p:nvPr/>
-        </p:nvSpPr>
-        <p:spPr>
-          <a:xfrm>
-            <a:off x="6339535" y="1645920"/>
-            <a:ext cx="73152" cy="4389120"/>
-          </a:xfrm>
-          <a:prstGeom prst="rect">
-            <a:avLst/>
-          </a:prstGeom>
-          <a:solidFill>
-            <a:srgbClr val="0D9488"/>
-          </a:solidFill>
-          <a:ln>
-            <a:noFill/>
-          </a:ln>
-        </p:spPr>
-        <p:style>
-          <a:lnRef idx="1">
-            <a:schemeClr val="accent1"/>
-          </a:lnRef>
-          <a:fillRef idx="3">
-            <a:schemeClr val="accent1"/>
-          </a:fillRef>
-          <a:effectRef idx="2">
-            <a:schemeClr val="accent1"/>
-          </a:effectRef>
-          <a:fontRef idx="minor">
-            <a:schemeClr val="lt1"/>
-          </a:fontRef>
-        </p:style>
-        <p:txBody>
-          <a:bodyPr rtlCol="0" anchor="ctr"/>
-          <a:lstStyle/>
-          <a:p>
-            <a:pPr algn="ctr"/>
-          </a:p>
-        </p:txBody>
-      </p:sp>
-      <p:sp>
-        <p:nvSpPr>
-          <p:cNvPr id="12" name="TextBox 11"/>
-          <p:cNvSpPr txBox="1"/>
-          <p:nvPr/>
-        </p:nvSpPr>
-        <p:spPr>
-          <a:xfrm>
-            <a:off x="6522415" y="1828800"/>
-            <a:ext cx="4937760" cy="4023360"/>
-          </a:xfrm>
-          <a:prstGeom prst="rect">
-            <a:avLst/>
-          </a:prstGeom>
-          <a:noFill/>
-        </p:spPr>
-        <p:txBody>
-          <a:bodyPr wrap="square">
-            <a:spAutoFit/>
-          </a:bodyPr>
-          <a:lstStyle/>
-          <a:p>
-            <a:pPr>
-              <a:spcAft>
-                <a:spcPts val="1400"/>
-              </a:spcAft>
-              <a:defRPr sz="1400" b="1">
-                <a:solidFill>
-                  <a:srgbClr val="0D9488"/>
-                </a:solidFill>
-                <a:latin typeface="Arial"/>
-              </a:defRPr>
-            </a:pPr>
-            <a:r>
-              <a:t>FICHE IMPLÉMENTATION INTERNE (MVP)</a:t>
-            </a:r>
-          </a:p>
-          <a:p>
-            <a:pPr>
-              <a:lnSpc>
-                <a:spcPct val="110000"/>
-              </a:lnSpc>
-              <a:spcAft>
-                <a:spcPts val="600"/>
-              </a:spcAft>
-              <a:defRPr sz="1050">
-                <a:solidFill>
-                  <a:srgbClr val="1F2937"/>
-                </a:solidFill>
-                <a:latin typeface="Calibri"/>
-              </a:defRPr>
-            </a:pPr>
-            <a:r>
-              <a:t>Données Nécessaires MVP :</a:t>
-            </a:r>
-            <a:br/>
-            <a:r>
-              <a:t>Statuts de clôture des dossiers suspects, montants initiaux provisionnés vs montants payés réels.</a:t>
-            </a:r>
-          </a:p>
-          <a:p>
-            <a:pPr>
-              <a:lnSpc>
-                <a:spcPct val="110000"/>
-              </a:lnSpc>
-              <a:spcAft>
-                <a:spcPts val="600"/>
-              </a:spcAft>
-              <a:defRPr sz="1050">
-                <a:solidFill>
-                  <a:srgbClr val="1F2937"/>
-                </a:solidFill>
-                <a:latin typeface="Calibri"/>
-              </a:defRPr>
-            </a:pPr>
-            <a:r>
-              <a:t>Stack Technique MVP :</a:t>
-            </a:r>
-            <a:br/>
-            <a:r>
-              <a:t>Module de Business Intelligence basique, tableaux de bord de reporting.</a:t>
-            </a:r>
-          </a:p>
-          <a:p>
-            <a:pPr>
-              <a:lnSpc>
-                <a:spcPct val="110000"/>
-              </a:lnSpc>
-              <a:spcAft>
-                <a:spcPts val="600"/>
-              </a:spcAft>
-              <a:defRPr sz="1050">
-                <a:solidFill>
-                  <a:srgbClr val="1F2937"/>
-                </a:solidFill>
-                <a:latin typeface="Calibri"/>
-              </a:defRPr>
-            </a:pPr>
-            <a:r>
-              <a:t>APIs &amp; Services :</a:t>
-            </a:r>
-            <a:br/>
-            <a:r>
-              <a:t>API d'agrégation de métriques globales.</a:t>
-            </a:r>
-          </a:p>
-          <a:p>
-            <a:pPr>
-              <a:lnSpc>
-                <a:spcPct val="110000"/>
-              </a:lnSpc>
-              <a:spcAft>
-                <a:spcPts val="600"/>
-              </a:spcAft>
-              <a:defRPr sz="1050">
-                <a:solidFill>
-                  <a:srgbClr val="1F2937"/>
-                </a:solidFill>
-                <a:latin typeface="Calibri"/>
-              </a:defRPr>
-            </a:pPr>
-            <a:r>
-              <a:t>Étapes Clés de Développement :</a:t>
-            </a:r>
-            <a:br/>
-            <a:r>
-              <a:t>Définition des KPIs clés, développement des graphiques de synthèse (taux de détection, montants économisés).</a:t>
-            </a:r>
-          </a:p>
-        </p:txBody>
-      </p:sp>
-    </p:spTree>
-  </p:cSld>
-  <p:clrMapOvr>
-    <a:masterClrMapping/>
-  </p:clrMapOvr>
-</p:sld>
-</file>
-
-<file path=ppt/slides/slide12.xml><?xml version="1.0" encoding="utf-8"?>
-<p:sld xmlns:a="http://schemas.openxmlformats.org/drawingml/2006/main" xmlns:p="http://schemas.openxmlformats.org/presentationml/2006/main" xmlns:r="http://schemas.openxmlformats.org/officeDocument/2006/relationships">
-  <p:cSld>
-    <p:spTree>
-      <p:nvGrpSpPr>
-        <p:cNvPr id="1" name=""/>
-        <p:cNvGrpSpPr/>
-        <p:nvPr/>
-      </p:nvGrpSpPr>
-      <p:grpSpPr/>
-      <p:sp>
-        <p:nvSpPr>
-          <p:cNvPr id="2" name="Rectangle 1"/>
-          <p:cNvSpPr/>
-          <p:nvPr/>
-        </p:nvSpPr>
-        <p:spPr>
-          <a:xfrm>
-            <a:off x="0" y="0"/>
-            <a:ext cx="12191695" cy="6858000"/>
-          </a:xfrm>
-          <a:prstGeom prst="rect">
-            <a:avLst/>
-          </a:prstGeom>
-          <a:solidFill>
-            <a:srgbClr val="FFFFFF"/>
-          </a:solidFill>
-          <a:ln>
-            <a:noFill/>
-          </a:ln>
-        </p:spPr>
-        <p:style>
-          <a:lnRef idx="1">
-            <a:schemeClr val="accent1"/>
-          </a:lnRef>
-          <a:fillRef idx="3">
-            <a:schemeClr val="accent1"/>
-          </a:fillRef>
-          <a:effectRef idx="2">
-            <a:schemeClr val="accent1"/>
-          </a:effectRef>
-          <a:fontRef idx="minor">
-            <a:schemeClr val="lt1"/>
-          </a:fontRef>
-        </p:style>
-        <p:txBody>
-          <a:bodyPr rtlCol="0" anchor="ctr"/>
-          <a:lstStyle/>
-          <a:p>
-            <a:pPr algn="ctr"/>
-          </a:p>
-        </p:txBody>
-      </p:sp>
-      <p:sp>
-        <p:nvSpPr>
-          <p:cNvPr id="3" name="TextBox 2"/>
-          <p:cNvSpPr txBox="1"/>
-          <p:nvPr/>
-        </p:nvSpPr>
-        <p:spPr>
-          <a:xfrm>
-            <a:off x="548640" y="365760"/>
-            <a:ext cx="10972800" cy="365760"/>
-          </a:xfrm>
-          <a:prstGeom prst="rect">
-            <a:avLst/>
-          </a:prstGeom>
-          <a:noFill/>
-        </p:spPr>
-        <p:txBody>
-          <a:bodyPr wrap="square" lIns="0" tIns="0" bIns="0" rIns="0">
-            <a:spAutoFit/>
-          </a:bodyPr>
-          <a:lstStyle/>
-          <a:p>
-            <a:pPr>
-              <a:defRPr sz="950" b="1">
-                <a:solidFill>
-                  <a:srgbClr val="0D9488"/>
-                </a:solidFill>
-                <a:latin typeface="Arial"/>
-              </a:defRPr>
-            </a:pPr>
-            <a:r>
-              <a:t>FRAUD INTELLIGENCE ACCELERATOR</a:t>
-            </a:r>
-          </a:p>
-        </p:txBody>
-      </p:sp>
-      <p:sp>
-        <p:nvSpPr>
-          <p:cNvPr id="4" name="TextBox 3"/>
-          <p:cNvSpPr txBox="1"/>
-          <p:nvPr/>
-        </p:nvSpPr>
-        <p:spPr>
-          <a:xfrm>
-            <a:off x="548640" y="640080"/>
-            <a:ext cx="10972800" cy="640080"/>
-          </a:xfrm>
-          <a:prstGeom prst="rect">
-            <a:avLst/>
-          </a:prstGeom>
-          <a:noFill/>
-        </p:spPr>
-        <p:txBody>
-          <a:bodyPr wrap="square" lIns="0" tIns="0" bIns="0" rIns="0">
-            <a:spAutoFit/>
-          </a:bodyPr>
-          <a:lstStyle/>
-          <a:p>
-            <a:pPr>
-              <a:defRPr sz="2400" b="1">
-                <a:solidFill>
-                  <a:srgbClr val="86318E"/>
-                </a:solidFill>
-                <a:latin typeface="Arial"/>
-              </a:defRPr>
-            </a:pPr>
-            <a:r>
-              <a:t>5. Roadmap Produit &amp; Boucle de Capitalisation</a:t>
-            </a:r>
-          </a:p>
-        </p:txBody>
-      </p:sp>
-      <p:sp>
-        <p:nvSpPr>
-          <p:cNvPr id="5" name="Rectangle 4"/>
-          <p:cNvSpPr/>
-          <p:nvPr/>
-        </p:nvSpPr>
-        <p:spPr>
-          <a:xfrm>
-            <a:off x="548640" y="1280160"/>
-            <a:ext cx="11094415" cy="18288"/>
-          </a:xfrm>
-          <a:prstGeom prst="rect">
-            <a:avLst/>
-          </a:prstGeom>
-          <a:solidFill>
-            <a:srgbClr val="E5E7EB"/>
-          </a:solidFill>
-          <a:ln>
-            <a:noFill/>
-          </a:ln>
-        </p:spPr>
-        <p:style>
-          <a:lnRef idx="1">
-            <a:schemeClr val="accent1"/>
-          </a:lnRef>
-          <a:fillRef idx="3">
-            <a:schemeClr val="accent1"/>
-          </a:fillRef>
-          <a:effectRef idx="2">
-            <a:schemeClr val="accent1"/>
-          </a:effectRef>
-          <a:fontRef idx="minor">
-            <a:schemeClr val="lt1"/>
-          </a:fontRef>
-        </p:style>
-        <p:txBody>
-          <a:bodyPr rtlCol="0" anchor="ctr"/>
-          <a:lstStyle/>
-          <a:p>
-            <a:pPr algn="ctr"/>
-          </a:p>
-        </p:txBody>
-      </p:sp>
-      <p:sp>
-        <p:nvSpPr>
-          <p:cNvPr id="6" name="TextBox 5"/>
-          <p:cNvSpPr txBox="1"/>
-          <p:nvPr/>
-        </p:nvSpPr>
-        <p:spPr>
-          <a:xfrm>
-            <a:off x="548640" y="6400800"/>
-            <a:ext cx="11094415" cy="274320"/>
-          </a:xfrm>
-          <a:prstGeom prst="rect">
-            <a:avLst/>
-          </a:prstGeom>
-          <a:noFill/>
-        </p:spPr>
-        <p:txBody>
-          <a:bodyPr wrap="none" lIns="0" tIns="0" bIns="0" rIns="0">
+          <a:bodyPr wrap="none" lIns="0" tIns="0" rIns="0" bIns="0">
             <a:spAutoFit/>
           </a:bodyPr>
           <a:lstStyle/>
@@ -4867,10 +4697,34 @@
                 <a:tableStyleId>{5C22544A-7EE6-4342-B048-85BDC9FD1C3A}</a:tableStyleId>
               </a:tblPr>
               <a:tblGrid>
-                <a:gridCol w="1097280"/>
-                <a:gridCol w="3474720"/>
-                <a:gridCol w="3474720"/>
-                <a:gridCol w="3047695"/>
+                <a:gridCol w="1097280">
+                  <a:extLst>
+                    <a:ext uri="{9D8B030D-6E8A-4147-A177-3AD203B41FA5}">
+                      <a16:colId xmlns:a16="http://schemas.microsoft.com/office/drawing/2014/main" val="20000"/>
+                    </a:ext>
+                  </a:extLst>
+                </a:gridCol>
+                <a:gridCol w="3474720">
+                  <a:extLst>
+                    <a:ext uri="{9D8B030D-6E8A-4147-A177-3AD203B41FA5}">
+                      <a16:colId xmlns:a16="http://schemas.microsoft.com/office/drawing/2014/main" val="20001"/>
+                    </a:ext>
+                  </a:extLst>
+                </a:gridCol>
+                <a:gridCol w="3474720">
+                  <a:extLst>
+                    <a:ext uri="{9D8B030D-6E8A-4147-A177-3AD203B41FA5}">
+                      <a16:colId xmlns:a16="http://schemas.microsoft.com/office/drawing/2014/main" val="20002"/>
+                    </a:ext>
+                  </a:extLst>
+                </a:gridCol>
+                <a:gridCol w="3047695">
+                  <a:extLst>
+                    <a:ext uri="{9D8B030D-6E8A-4147-A177-3AD203B41FA5}">
+                      <a16:colId xmlns:a16="http://schemas.microsoft.com/office/drawing/2014/main" val="20003"/>
+                    </a:ext>
+                  </a:extLst>
+                </a:gridCol>
               </a:tblGrid>
               <a:tr h="822960">
                 <a:tc>
@@ -4965,6 +4819,11 @@
                     </a:solidFill>
                   </a:tcPr>
                 </a:tc>
+                <a:extLst>
+                  <a:ext uri="{0D108BD9-81ED-4DB2-BD59-A6C34878D82A}">
+                    <a16:rowId xmlns:a16="http://schemas.microsoft.com/office/drawing/2014/main" val="10000"/>
+                  </a:ext>
+                </a:extLst>
               </a:tr>
               <a:tr h="822960">
                 <a:tc>
@@ -5059,6 +4918,11 @@
                     </a:solidFill>
                   </a:tcPr>
                 </a:tc>
+                <a:extLst>
+                  <a:ext uri="{0D108BD9-81ED-4DB2-BD59-A6C34878D82A}">
+                    <a16:rowId xmlns:a16="http://schemas.microsoft.com/office/drawing/2014/main" val="10001"/>
+                  </a:ext>
+                </a:extLst>
               </a:tr>
               <a:tr h="822960">
                 <a:tc>
@@ -5153,6 +5017,11 @@
                     </a:solidFill>
                   </a:tcPr>
                 </a:tc>
+                <a:extLst>
+                  <a:ext uri="{0D108BD9-81ED-4DB2-BD59-A6C34878D82A}">
+                    <a16:rowId xmlns:a16="http://schemas.microsoft.com/office/drawing/2014/main" val="10002"/>
+                  </a:ext>
+                </a:extLst>
               </a:tr>
               <a:tr h="822960">
                 <a:tc>
@@ -5247,6 +5116,11 @@
                     </a:solidFill>
                   </a:tcPr>
                 </a:tc>
+                <a:extLst>
+                  <a:ext uri="{0D108BD9-81ED-4DB2-BD59-A6C34878D82A}">
+                    <a16:rowId xmlns:a16="http://schemas.microsoft.com/office/drawing/2014/main" val="10003"/>
+                  </a:ext>
+                </a:extLst>
               </a:tr>
               <a:tr h="822960">
                 <a:tc>
@@ -5341,6 +5215,11 @@
                     </a:solidFill>
                   </a:tcPr>
                 </a:tc>
+                <a:extLst>
+                  <a:ext uri="{0D108BD9-81ED-4DB2-BD59-A6C34878D82A}">
+                    <a16:rowId xmlns:a16="http://schemas.microsoft.com/office/drawing/2014/main" val="10004"/>
+                  </a:ext>
+                </a:extLst>
               </a:tr>
             </a:tbl>
           </a:graphicData>
@@ -5354,8 +5233,8 @@
 </p:sld>
 </file>
 
-<file path=ppt/slides/slide13.xml><?xml version="1.0" encoding="utf-8"?>
-<p:sld xmlns:a="http://schemas.openxmlformats.org/drawingml/2006/main" xmlns:p="http://schemas.openxmlformats.org/presentationml/2006/main" xmlns:r="http://schemas.openxmlformats.org/officeDocument/2006/relationships">
+<file path=ppt/slides/slide12.xml><?xml version="1.0" encoding="utf-8"?>
+<p:sld xmlns:a="http://schemas.openxmlformats.org/drawingml/2006/main" xmlns:r="http://schemas.openxmlformats.org/officeDocument/2006/relationships" xmlns:p="http://schemas.openxmlformats.org/presentationml/2006/main">
   <p:cSld>
     <p:spTree>
       <p:nvGrpSpPr>
@@ -5363,7 +5242,14 @@
         <p:cNvGrpSpPr/>
         <p:nvPr/>
       </p:nvGrpSpPr>
-      <p:grpSpPr/>
+      <p:grpSpPr>
+        <a:xfrm>
+          <a:off x="0" y="0"/>
+          <a:ext cx="0" cy="0"/>
+          <a:chOff x="0" y="0"/>
+          <a:chExt cx="0" cy="0"/>
+        </a:xfrm>
+      </p:grpSpPr>
       <p:sp>
         <p:nvSpPr>
           <p:cNvPr id="2" name="Rectangle 1"/>
@@ -5404,6 +5290,7 @@
           <a:lstStyle/>
           <a:p>
             <a:pPr algn="ctr"/>
+            <a:endParaRPr/>
           </a:p>
         </p:txBody>
       </p:sp>
@@ -5424,7 +5311,7 @@
           <a:noFill/>
         </p:spPr>
         <p:txBody>
-          <a:bodyPr wrap="square" lIns="0" tIns="0" bIns="0" rIns="0">
+          <a:bodyPr wrap="square" lIns="0" tIns="0" rIns="0" bIns="0">
             <a:spAutoFit/>
           </a:bodyPr>
           <a:lstStyle/>
@@ -5460,7 +5347,7 @@
           <a:noFill/>
         </p:spPr>
         <p:txBody>
-          <a:bodyPr wrap="square" lIns="0" tIns="0" bIns="0" rIns="0">
+          <a:bodyPr wrap="square" lIns="0" tIns="0" rIns="0" bIns="0">
             <a:spAutoFit/>
           </a:bodyPr>
           <a:lstStyle/>
@@ -5519,6 +5406,7 @@
           <a:lstStyle/>
           <a:p>
             <a:pPr algn="ctr"/>
+            <a:endParaRPr/>
           </a:p>
         </p:txBody>
       </p:sp>
@@ -5539,7 +5427,7 @@
           <a:noFill/>
         </p:spPr>
         <p:txBody>
-          <a:bodyPr wrap="none" lIns="0" tIns="0" bIns="0" rIns="0">
+          <a:bodyPr wrap="none" lIns="0" tIns="0" rIns="0" bIns="0">
             <a:spAutoFit/>
           </a:bodyPr>
           <a:lstStyle/>
@@ -5577,10 +5465,34 @@
                 <a:tableStyleId>{5C22544A-7EE6-4342-B048-85BDC9FD1C3A}</a:tableStyleId>
               </a:tblPr>
               <a:tblGrid>
-                <a:gridCol w="2286000"/>
-                <a:gridCol w="2560320"/>
-                <a:gridCol w="2560320"/>
-                <a:gridCol w="3687775"/>
+                <a:gridCol w="2286000">
+                  <a:extLst>
+                    <a:ext uri="{9D8B030D-6E8A-4147-A177-3AD203B41FA5}">
+                      <a16:colId xmlns:a16="http://schemas.microsoft.com/office/drawing/2014/main" val="20000"/>
+                    </a:ext>
+                  </a:extLst>
+                </a:gridCol>
+                <a:gridCol w="2560320">
+                  <a:extLst>
+                    <a:ext uri="{9D8B030D-6E8A-4147-A177-3AD203B41FA5}">
+                      <a16:colId xmlns:a16="http://schemas.microsoft.com/office/drawing/2014/main" val="20001"/>
+                    </a:ext>
+                  </a:extLst>
+                </a:gridCol>
+                <a:gridCol w="2560320">
+                  <a:extLst>
+                    <a:ext uri="{9D8B030D-6E8A-4147-A177-3AD203B41FA5}">
+                      <a16:colId xmlns:a16="http://schemas.microsoft.com/office/drawing/2014/main" val="20002"/>
+                    </a:ext>
+                  </a:extLst>
+                </a:gridCol>
+                <a:gridCol w="3687775">
+                  <a:extLst>
+                    <a:ext uri="{9D8B030D-6E8A-4147-A177-3AD203B41FA5}">
+                      <a16:colId xmlns:a16="http://schemas.microsoft.com/office/drawing/2014/main" val="20003"/>
+                    </a:ext>
+                  </a:extLst>
+                </a:gridCol>
               </a:tblGrid>
               <a:tr h="685800">
                 <a:tc>
@@ -5675,6 +5587,11 @@
                     </a:solidFill>
                   </a:tcPr>
                 </a:tc>
+                <a:extLst>
+                  <a:ext uri="{0D108BD9-81ED-4DB2-BD59-A6C34878D82A}">
+                    <a16:rowId xmlns:a16="http://schemas.microsoft.com/office/drawing/2014/main" val="10000"/>
+                  </a:ext>
+                </a:extLst>
               </a:tr>
               <a:tr h="685800">
                 <a:tc>
@@ -5769,6 +5686,11 @@
                     </a:solidFill>
                   </a:tcPr>
                 </a:tc>
+                <a:extLst>
+                  <a:ext uri="{0D108BD9-81ED-4DB2-BD59-A6C34878D82A}">
+                    <a16:rowId xmlns:a16="http://schemas.microsoft.com/office/drawing/2014/main" val="10001"/>
+                  </a:ext>
+                </a:extLst>
               </a:tr>
               <a:tr h="685800">
                 <a:tc>
@@ -5863,6 +5785,11 @@
                     </a:solidFill>
                   </a:tcPr>
                 </a:tc>
+                <a:extLst>
+                  <a:ext uri="{0D108BD9-81ED-4DB2-BD59-A6C34878D82A}">
+                    <a16:rowId xmlns:a16="http://schemas.microsoft.com/office/drawing/2014/main" val="10002"/>
+                  </a:ext>
+                </a:extLst>
               </a:tr>
               <a:tr h="685800">
                 <a:tc>
@@ -5957,6 +5884,11 @@
                     </a:solidFill>
                   </a:tcPr>
                 </a:tc>
+                <a:extLst>
+                  <a:ext uri="{0D108BD9-81ED-4DB2-BD59-A6C34878D82A}">
+                    <a16:rowId xmlns:a16="http://schemas.microsoft.com/office/drawing/2014/main" val="10003"/>
+                  </a:ext>
+                </a:extLst>
               </a:tr>
               <a:tr h="685800">
                 <a:tc>
@@ -6051,6 +5983,11 @@
                     </a:solidFill>
                   </a:tcPr>
                 </a:tc>
+                <a:extLst>
+                  <a:ext uri="{0D108BD9-81ED-4DB2-BD59-A6C34878D82A}">
+                    <a16:rowId xmlns:a16="http://schemas.microsoft.com/office/drawing/2014/main" val="10004"/>
+                  </a:ext>
+                </a:extLst>
               </a:tr>
               <a:tr h="685800">
                 <a:tc>
@@ -6145,6 +6082,11 @@
                     </a:solidFill>
                   </a:tcPr>
                 </a:tc>
+                <a:extLst>
+                  <a:ext uri="{0D108BD9-81ED-4DB2-BD59-A6C34878D82A}">
+                    <a16:rowId xmlns:a16="http://schemas.microsoft.com/office/drawing/2014/main" val="10005"/>
+                  </a:ext>
+                </a:extLst>
               </a:tr>
             </a:tbl>
           </a:graphicData>
@@ -6158,8 +6100,8 @@
 </p:sld>
 </file>
 
-<file path=ppt/slides/slide14.xml><?xml version="1.0" encoding="utf-8"?>
-<p:sld xmlns:a="http://schemas.openxmlformats.org/drawingml/2006/main" xmlns:p="http://schemas.openxmlformats.org/presentationml/2006/main" xmlns:r="http://schemas.openxmlformats.org/officeDocument/2006/relationships">
+<file path=ppt/slides/slide13.xml><?xml version="1.0" encoding="utf-8"?>
+<p:sld xmlns:a="http://schemas.openxmlformats.org/drawingml/2006/main" xmlns:r="http://schemas.openxmlformats.org/officeDocument/2006/relationships" xmlns:p="http://schemas.openxmlformats.org/presentationml/2006/main">
   <p:cSld>
     <p:spTree>
       <p:nvGrpSpPr>
@@ -6167,7 +6109,14 @@
         <p:cNvGrpSpPr/>
         <p:nvPr/>
       </p:nvGrpSpPr>
-      <p:grpSpPr/>
+      <p:grpSpPr>
+        <a:xfrm>
+          <a:off x="0" y="0"/>
+          <a:ext cx="0" cy="0"/>
+          <a:chOff x="0" y="0"/>
+          <a:chExt cx="0" cy="0"/>
+        </a:xfrm>
+      </p:grpSpPr>
       <p:sp>
         <p:nvSpPr>
           <p:cNvPr id="2" name="Rectangle 1"/>
@@ -6208,6 +6157,7 @@
           <a:lstStyle/>
           <a:p>
             <a:pPr algn="ctr"/>
+            <a:endParaRPr/>
           </a:p>
         </p:txBody>
       </p:sp>
@@ -6228,7 +6178,7 @@
           <a:noFill/>
         </p:spPr>
         <p:txBody>
-          <a:bodyPr wrap="square" lIns="0" tIns="0" bIns="0" rIns="0">
+          <a:bodyPr wrap="square" lIns="0" tIns="0" rIns="0" bIns="0">
             <a:spAutoFit/>
           </a:bodyPr>
           <a:lstStyle/>
@@ -6264,7 +6214,7 @@
           <a:noFill/>
         </p:spPr>
         <p:txBody>
-          <a:bodyPr wrap="square" lIns="0" tIns="0" bIns="0" rIns="0">
+          <a:bodyPr wrap="square" lIns="0" tIns="0" rIns="0" bIns="0">
             <a:spAutoFit/>
           </a:bodyPr>
           <a:lstStyle/>
@@ -6323,6 +6273,7 @@
           <a:lstStyle/>
           <a:p>
             <a:pPr algn="ctr"/>
+            <a:endParaRPr/>
           </a:p>
         </p:txBody>
       </p:sp>
@@ -6343,7 +6294,7 @@
           <a:noFill/>
         </p:spPr>
         <p:txBody>
-          <a:bodyPr wrap="none" lIns="0" tIns="0" bIns="0" rIns="0">
+          <a:bodyPr wrap="none" lIns="0" tIns="0" rIns="0" bIns="0">
             <a:spAutoFit/>
           </a:bodyPr>
           <a:lstStyle/>
@@ -6404,6 +6355,7 @@
           <a:lstStyle/>
           <a:p>
             <a:pPr algn="ctr"/>
+            <a:endParaRPr/>
           </a:p>
         </p:txBody>
       </p:sp>
@@ -6447,6 +6399,7 @@
           <a:lstStyle/>
           <a:p>
             <a:pPr algn="ctr"/>
+            <a:endParaRPr/>
           </a:p>
         </p:txBody>
       </p:sp>
@@ -6607,6 +6560,7 @@
           <a:lstStyle/>
           <a:p>
             <a:pPr algn="ctr"/>
+            <a:endParaRPr/>
           </a:p>
         </p:txBody>
       </p:sp>
@@ -6650,6 +6604,7 @@
           <a:lstStyle/>
           <a:p>
             <a:pPr algn="ctr"/>
+            <a:endParaRPr/>
           </a:p>
         </p:txBody>
       </p:sp>
@@ -6764,155 +6719,6 @@
             </a:pPr>
             <a:r>
               <a:t>• Implication active des équipes IT/Data pour les connecteurs d'extraction.</a:t>
-            </a:r>
-          </a:p>
-        </p:txBody>
-      </p:sp>
-    </p:spTree>
-  </p:cSld>
-  <p:clrMapOvr>
-    <a:masterClrMapping/>
-  </p:clrMapOvr>
-</p:sld>
-</file>
-
-<file path=ppt/slides/slide15.xml><?xml version="1.0" encoding="utf-8"?>
-<p:sld xmlns:a="http://schemas.openxmlformats.org/drawingml/2006/main" xmlns:p="http://schemas.openxmlformats.org/presentationml/2006/main" xmlns:r="http://schemas.openxmlformats.org/officeDocument/2006/relationships">
-  <p:cSld>
-    <p:spTree>
-      <p:nvGrpSpPr>
-        <p:cNvPr id="1" name=""/>
-        <p:cNvGrpSpPr/>
-        <p:nvPr/>
-      </p:nvGrpSpPr>
-      <p:grpSpPr/>
-      <p:sp>
-        <p:nvSpPr>
-          <p:cNvPr id="2" name="Rectangle 1"/>
-          <p:cNvSpPr/>
-          <p:nvPr/>
-        </p:nvSpPr>
-        <p:spPr>
-          <a:xfrm>
-            <a:off x="0" y="0"/>
-            <a:ext cx="12191695" cy="6858000"/>
-          </a:xfrm>
-          <a:prstGeom prst="rect">
-            <a:avLst/>
-          </a:prstGeom>
-          <a:solidFill>
-            <a:srgbClr val="86318E"/>
-          </a:solidFill>
-          <a:ln>
-            <a:noFill/>
-          </a:ln>
-        </p:spPr>
-        <p:style>
-          <a:lnRef idx="1">
-            <a:schemeClr val="accent1"/>
-          </a:lnRef>
-          <a:fillRef idx="3">
-            <a:schemeClr val="accent1"/>
-          </a:fillRef>
-          <a:effectRef idx="2">
-            <a:schemeClr val="accent1"/>
-          </a:effectRef>
-          <a:fontRef idx="minor">
-            <a:schemeClr val="lt1"/>
-          </a:fontRef>
-        </p:style>
-        <p:txBody>
-          <a:bodyPr rtlCol="0" anchor="ctr"/>
-          <a:lstStyle/>
-          <a:p>
-            <a:pPr algn="ctr"/>
-          </a:p>
-        </p:txBody>
-      </p:sp>
-      <p:sp>
-        <p:nvSpPr>
-          <p:cNvPr id="3" name="TextBox 2"/>
-          <p:cNvSpPr txBox="1"/>
-          <p:nvPr/>
-        </p:nvSpPr>
-        <p:spPr>
-          <a:xfrm>
-            <a:off x="914400" y="2560320"/>
-            <a:ext cx="10362895" cy="1371600"/>
-          </a:xfrm>
-          <a:prstGeom prst="rect">
-            <a:avLst/>
-          </a:prstGeom>
-          <a:noFill/>
-        </p:spPr>
-        <p:txBody>
-          <a:bodyPr wrap="none">
-            <a:spAutoFit/>
-          </a:bodyPr>
-          <a:lstStyle/>
-          <a:p>
-            <a:pPr algn="ctr">
-              <a:defRPr sz="3600" b="1">
-                <a:solidFill>
-                  <a:srgbClr val="FFFFFF"/>
-                </a:solidFill>
-                <a:latin typeface="Arial"/>
-              </a:defRPr>
-            </a:pPr>
-            <a:r>
-              <a:t>Merci pour votre confiance</a:t>
-            </a:r>
-          </a:p>
-          <a:p>
-            <a:pPr algn="ctr">
-              <a:spcBef>
-                <a:spcPts val="1200"/>
-              </a:spcBef>
-              <a:defRPr sz="1600">
-                <a:solidFill>
-                  <a:srgbClr val="0D9488"/>
-                </a:solidFill>
-                <a:latin typeface="Arial"/>
-              </a:defRPr>
-            </a:pPr>
-            <a:r>
-              <a:t>Co-construisons le futur de l'assurance chez SanlamAllianz</a:t>
-            </a:r>
-          </a:p>
-        </p:txBody>
-      </p:sp>
-      <p:sp>
-        <p:nvSpPr>
-          <p:cNvPr id="4" name="TextBox 3"/>
-          <p:cNvSpPr txBox="1"/>
-          <p:nvPr/>
-        </p:nvSpPr>
-        <p:spPr>
-          <a:xfrm>
-            <a:off x="914400" y="5303520"/>
-            <a:ext cx="10362895" cy="731520"/>
-          </a:xfrm>
-          <a:prstGeom prst="rect">
-            <a:avLst/>
-          </a:prstGeom>
-          <a:noFill/>
-        </p:spPr>
-        <p:txBody>
-          <a:bodyPr wrap="none">
-            <a:spAutoFit/>
-          </a:bodyPr>
-          <a:lstStyle/>
-          <a:p>
-            <a:pPr algn="ctr">
-              <a:defRPr sz="1100">
-                <a:solidFill>
-                  <a:srgbClr val="F9FAFB"/>
-                </a:solidFill>
-                <a:latin typeface="Calibri"/>
-              </a:defRPr>
-            </a:pPr>
-            <a:r>
-              <a:t>Ekinox Consulting Team  |  contact@ekinox.io  |  Projet Pilote Accelerator</a:t>
             </a:r>
           </a:p>
         </p:txBody>
@@ -6926,7 +6732,7 @@
 </file>
 
 <file path=ppt/slides/slide2.xml><?xml version="1.0" encoding="utf-8"?>
-<p:sld xmlns:a="http://schemas.openxmlformats.org/drawingml/2006/main" xmlns:p="http://schemas.openxmlformats.org/presentationml/2006/main" xmlns:r="http://schemas.openxmlformats.org/officeDocument/2006/relationships">
+<p:sld xmlns:a="http://schemas.openxmlformats.org/drawingml/2006/main" xmlns:r="http://schemas.openxmlformats.org/officeDocument/2006/relationships" xmlns:p="http://schemas.openxmlformats.org/presentationml/2006/main">
   <p:cSld>
     <p:spTree>
       <p:nvGrpSpPr>
@@ -6934,7 +6740,14 @@
         <p:cNvGrpSpPr/>
         <p:nvPr/>
       </p:nvGrpSpPr>
-      <p:grpSpPr/>
+      <p:grpSpPr>
+        <a:xfrm>
+          <a:off x="0" y="0"/>
+          <a:ext cx="0" cy="0"/>
+          <a:chOff x="0" y="0"/>
+          <a:chExt cx="0" cy="0"/>
+        </a:xfrm>
+      </p:grpSpPr>
       <p:sp>
         <p:nvSpPr>
           <p:cNvPr id="2" name="Rectangle 1"/>
@@ -6975,6 +6788,7 @@
           <a:lstStyle/>
           <a:p>
             <a:pPr algn="ctr"/>
+            <a:endParaRPr/>
           </a:p>
         </p:txBody>
       </p:sp>
@@ -6995,7 +6809,7 @@
           <a:noFill/>
         </p:spPr>
         <p:txBody>
-          <a:bodyPr wrap="square" lIns="0" tIns="0" bIns="0" rIns="0">
+          <a:bodyPr wrap="square" lIns="0" tIns="0" rIns="0" bIns="0">
             <a:spAutoFit/>
           </a:bodyPr>
           <a:lstStyle/>
@@ -7031,7 +6845,7 @@
           <a:noFill/>
         </p:spPr>
         <p:txBody>
-          <a:bodyPr wrap="square" lIns="0" tIns="0" bIns="0" rIns="0">
+          <a:bodyPr wrap="square" lIns="0" tIns="0" rIns="0" bIns="0">
             <a:spAutoFit/>
           </a:bodyPr>
           <a:lstStyle/>
@@ -7045,7 +6859,7 @@
               </a:defRPr>
             </a:pPr>
             <a:r>
-              <a:t>1. Alignement Stratégique &amp; Positionnement</a:t>
+              <a:t>2. Product Blueprint &amp; Principes Directeurs</a:t>
             </a:r>
           </a:p>
         </p:txBody>
@@ -7090,6 +6904,7 @@
           <a:lstStyle/>
           <a:p>
             <a:pPr algn="ctr"/>
+            <a:endParaRPr/>
           </a:p>
         </p:txBody>
       </p:sp>
@@ -7110,7 +6925,7 @@
           <a:noFill/>
         </p:spPr>
         <p:txBody>
-          <a:bodyPr wrap="none" lIns="0" tIns="0" bIns="0" rIns="0">
+          <a:bodyPr wrap="none" lIns="0" tIns="0" rIns="0" bIns="0">
             <a:spAutoFit/>
           </a:bodyPr>
           <a:lstStyle/>
@@ -7124,7 +6939,7 @@
               </a:defRPr>
             </a:pPr>
             <a:r>
-              <a:t>Ekinox Consulting  |  Proposition de Transformation  |  Confidentialité SanlamAllianz  |  Slide 2</a:t>
+              <a:t>Ekinox Consulting  |  Proposition de Transformation  |  Confidentialité SanlamAllianz  |  Slide 3</a:t>
             </a:r>
           </a:p>
         </p:txBody>
@@ -7137,8 +6952,8 @@
         </p:nvSpPr>
         <p:spPr>
           <a:xfrm>
-            <a:off x="548640" y="1645920"/>
-            <a:ext cx="5303520" cy="4114800"/>
+            <a:off x="548640" y="1371600"/>
+            <a:ext cx="11094415" cy="457200"/>
           </a:xfrm>
           <a:prstGeom prst="rect">
             <a:avLst/>
@@ -7146,46 +6961,21 @@
           <a:noFill/>
         </p:spPr>
         <p:txBody>
-          <a:bodyPr wrap="square" lIns="0" tIns="0" bIns="0" rIns="0">
+          <a:bodyPr wrap="none" lIns="0" tIns="0" rIns="0" bIns="0">
             <a:spAutoFit/>
           </a:bodyPr>
           <a:lstStyle/>
           <a:p>
             <a:pPr>
-              <a:lnSpc>
-                <a:spcPct val="120000"/>
-              </a:lnSpc>
-              <a:spcAft>
-                <a:spcPts val="1400"/>
-              </a:spcAft>
-              <a:defRPr sz="1300">
+              <a:defRPr sz="1100" i="1">
                 <a:solidFill>
                   <a:srgbClr val="1F2937"/>
                 </a:solidFill>
-                <a:latin typeface="Arial"/>
-              </a:defRPr>
-            </a:pPr>
-            <a:r>
-              <a:t>La maîtrise du loss ratio est le premier levier de rentabilité technique de SanlamAllianz.</a:t>
-            </a:r>
-          </a:p>
-          <a:p>
-            <a:pPr>
-              <a:lnSpc>
-                <a:spcPct val="120000"/>
-              </a:lnSpc>
-              <a:spcAft>
-                <a:spcPts val="1400"/>
-              </a:spcAft>
-              <a:defRPr sz="1300">
-                <a:solidFill>
-                  <a:srgbClr val="1F2937"/>
-                </a:solidFill>
-                <a:latin typeface="Arial"/>
-              </a:defRPr>
-            </a:pPr>
-            <a:r>
-              <a:t>La Fraud Intelligence Platform permet de systématiser la détection des anomalies, d'optimiser le temps des enquêteurs via des alertes explicitables, et d'organiser la capitalisation continue des nouveaux modus operandi.</a:t>
+                <a:latin typeface="Calibri"/>
+              </a:defRPr>
+            </a:pPr>
+            <a:r>
+              <a:t>Le développement de la plateforme anti-fraude repose sur des principes clairs de traçabilité, d'aide à la décision et d'évolution modulaire.</a:t>
             </a:r>
           </a:p>
         </p:txBody>
@@ -7198,8 +6988,8 @@
         </p:nvSpPr>
         <p:spPr>
           <a:xfrm>
-            <a:off x="6339535" y="1645920"/>
-            <a:ext cx="5303520" cy="1188720"/>
+            <a:off x="548640" y="1920240"/>
+            <a:ext cx="3520440" cy="2011680"/>
           </a:xfrm>
           <a:prstGeom prst="rect">
             <a:avLst/>
@@ -7232,6 +7022,7 @@
           <a:lstStyle/>
           <a:p>
             <a:pPr algn="ctr"/>
+            <a:endParaRPr/>
           </a:p>
         </p:txBody>
       </p:sp>
@@ -7243,14 +7034,14 @@
         </p:nvSpPr>
         <p:spPr>
           <a:xfrm>
-            <a:off x="6339535" y="1645920"/>
-            <a:ext cx="64008" cy="1188720"/>
+            <a:off x="548640" y="1920240"/>
+            <a:ext cx="54864" cy="2011680"/>
           </a:xfrm>
           <a:prstGeom prst="rect">
             <a:avLst/>
           </a:prstGeom>
           <a:solidFill>
-            <a:srgbClr val="0D9488"/>
+            <a:srgbClr val="86318E"/>
           </a:solidFill>
           <a:ln>
             <a:noFill/>
@@ -7275,6 +7066,7 @@
           <a:lstStyle/>
           <a:p>
             <a:pPr algn="ctr"/>
+            <a:endParaRPr/>
           </a:p>
         </p:txBody>
       </p:sp>
@@ -7286,8 +7078,8 @@
         </p:nvSpPr>
         <p:spPr>
           <a:xfrm>
-            <a:off x="6537960" y="1783080"/>
-            <a:ext cx="4937760" cy="914400"/>
+            <a:off x="685800" y="2057400"/>
+            <a:ext cx="3291840" cy="1737360"/>
           </a:xfrm>
           <a:prstGeom prst="rect">
             <a:avLst/>
@@ -7302,9 +7094,9 @@
           <a:p>
             <a:pPr>
               <a:spcAft>
-                <a:spcPts val="400"/>
+                <a:spcPts val="800"/>
               </a:spcAft>
-              <a:defRPr sz="1100" b="1">
+              <a:defRPr sz="1150" b="1">
                 <a:solidFill>
                   <a:srgbClr val="86318E"/>
                 </a:solidFill>
@@ -7312,7 +7104,7 @@
               </a:defRPr>
             </a:pPr>
             <a:r>
-              <a:t>DÉTECTION PRÉCOCE</a:t>
+              <a:t>BUSINESS FIRST</a:t>
             </a:r>
           </a:p>
           <a:p>
@@ -7328,7 +7120,7 @@
               </a:defRPr>
             </a:pPr>
             <a:r>
-              <a:t>Fast-track des dossiers sains et priorisation automatique des alertes suspectes selon leur montant financier.</a:t>
+              <a:t>L'objectif principal est de réduire la charge sinistre et d'optimiser le temps des gestionnaires.</a:t>
             </a:r>
           </a:p>
         </p:txBody>
@@ -7341,8 +7133,8 @@
         </p:nvSpPr>
         <p:spPr>
           <a:xfrm>
-            <a:off x="6339535" y="3108960"/>
-            <a:ext cx="5303520" cy="1188720"/>
+            <a:off x="4334256" y="1920240"/>
+            <a:ext cx="3520440" cy="2011680"/>
           </a:xfrm>
           <a:prstGeom prst="rect">
             <a:avLst/>
@@ -7375,6 +7167,7 @@
           <a:lstStyle/>
           <a:p>
             <a:pPr algn="ctr"/>
+            <a:endParaRPr/>
           </a:p>
         </p:txBody>
       </p:sp>
@@ -7386,8 +7179,8 @@
         </p:nvSpPr>
         <p:spPr>
           <a:xfrm>
-            <a:off x="6339535" y="3108960"/>
-            <a:ext cx="64008" cy="1188720"/>
+            <a:off x="4334256" y="1920240"/>
+            <a:ext cx="54864" cy="2011680"/>
           </a:xfrm>
           <a:prstGeom prst="rect">
             <a:avLst/>
@@ -7418,6 +7211,7 @@
           <a:lstStyle/>
           <a:p>
             <a:pPr algn="ctr"/>
+            <a:endParaRPr/>
           </a:p>
         </p:txBody>
       </p:sp>
@@ -7429,8 +7223,8 @@
         </p:nvSpPr>
         <p:spPr>
           <a:xfrm>
-            <a:off x="6537960" y="3246120"/>
-            <a:ext cx="4937760" cy="914400"/>
+            <a:off x="4471416" y="2057400"/>
+            <a:ext cx="3291840" cy="1737360"/>
           </a:xfrm>
           <a:prstGeom prst="rect">
             <a:avLst/>
@@ -7445,17 +7239,17 @@
           <a:p>
             <a:pPr>
               <a:spcAft>
-                <a:spcPts val="400"/>
+                <a:spcPts val="800"/>
               </a:spcAft>
-              <a:defRPr sz="1100" b="1">
-                <a:solidFill>
-                  <a:srgbClr val="86318E"/>
+              <a:defRPr sz="1150" b="1">
+                <a:solidFill>
+                  <a:srgbClr val="0D9488"/>
                 </a:solidFill>
                 <a:latin typeface="Arial"/>
               </a:defRPr>
             </a:pPr>
             <a:r>
-              <a:t>EXPLICABILITÉ (EXPLAINABLE AI)</a:t>
+              <a:t>API-READY</a:t>
             </a:r>
           </a:p>
           <a:p>
@@ -7471,7 +7265,7 @@
               </a:defRPr>
             </a:pPr>
             <a:r>
-              <a:t>Justification textuelle claire de chaque score de fraude pour accompagner la décision humaine.</a:t>
+              <a:t>Capacité à ingérer des flux de sinistres en temps réel ou en batch depuis les systèmes core de gestion.</a:t>
             </a:r>
           </a:p>
         </p:txBody>
@@ -7484,8 +7278,8 @@
         </p:nvSpPr>
         <p:spPr>
           <a:xfrm>
-            <a:off x="6339535" y="4572000"/>
-            <a:ext cx="5303520" cy="1188720"/>
+            <a:off x="8119872" y="1920240"/>
+            <a:ext cx="3520440" cy="2011680"/>
           </a:xfrm>
           <a:prstGeom prst="rect">
             <a:avLst/>
@@ -7518,6 +7312,7 @@
           <a:lstStyle/>
           <a:p>
             <a:pPr algn="ctr"/>
+            <a:endParaRPr/>
           </a:p>
         </p:txBody>
       </p:sp>
@@ -7529,8 +7324,153 @@
         </p:nvSpPr>
         <p:spPr>
           <a:xfrm>
-            <a:off x="6339535" y="4572000"/>
-            <a:ext cx="64008" cy="1188720"/>
+            <a:off x="8119872" y="1920240"/>
+            <a:ext cx="54864" cy="2011680"/>
+          </a:xfrm>
+          <a:prstGeom prst="rect">
+            <a:avLst/>
+          </a:prstGeom>
+          <a:solidFill>
+            <a:srgbClr val="86318E"/>
+          </a:solidFill>
+          <a:ln>
+            <a:noFill/>
+          </a:ln>
+        </p:spPr>
+        <p:style>
+          <a:lnRef idx="1">
+            <a:schemeClr val="accent1"/>
+          </a:lnRef>
+          <a:fillRef idx="3">
+            <a:schemeClr val="accent1"/>
+          </a:fillRef>
+          <a:effectRef idx="2">
+            <a:schemeClr val="accent1"/>
+          </a:effectRef>
+          <a:fontRef idx="minor">
+            <a:schemeClr val="lt1"/>
+          </a:fontRef>
+        </p:style>
+        <p:txBody>
+          <a:bodyPr rtlCol="0" anchor="ctr"/>
+          <a:lstStyle/>
+          <a:p>
+            <a:pPr algn="ctr"/>
+            <a:endParaRPr/>
+          </a:p>
+        </p:txBody>
+      </p:sp>
+      <p:sp>
+        <p:nvSpPr>
+          <p:cNvPr id="16" name="TextBox 15"/>
+          <p:cNvSpPr txBox="1"/>
+          <p:nvPr/>
+        </p:nvSpPr>
+        <p:spPr>
+          <a:xfrm>
+            <a:off x="8257032" y="2057400"/>
+            <a:ext cx="3291840" cy="1737360"/>
+          </a:xfrm>
+          <a:prstGeom prst="rect">
+            <a:avLst/>
+          </a:prstGeom>
+          <a:noFill/>
+        </p:spPr>
+        <p:txBody>
+          <a:bodyPr wrap="square">
+            <a:spAutoFit/>
+          </a:bodyPr>
+          <a:lstStyle/>
+          <a:p>
+            <a:pPr>
+              <a:spcAft>
+                <a:spcPts val="800"/>
+              </a:spcAft>
+              <a:defRPr sz="1150" b="1">
+                <a:solidFill>
+                  <a:srgbClr val="86318E"/>
+                </a:solidFill>
+                <a:latin typeface="Arial"/>
+              </a:defRPr>
+            </a:pPr>
+            <a:r>
+              <a:t>MVP BY DESIGN</a:t>
+            </a:r>
+          </a:p>
+          <a:p>
+            <a:pPr>
+              <a:lnSpc>
+                <a:spcPct val="110000"/>
+              </a:lnSpc>
+              <a:defRPr sz="1000">
+                <a:solidFill>
+                  <a:srgbClr val="1F2937"/>
+                </a:solidFill>
+                <a:latin typeface="Calibri"/>
+              </a:defRPr>
+            </a:pPr>
+            <a:r>
+              <a:t>Concentration initiale sur les lignes d'affaires les plus à risque (ex: Auto) avant extension globale.</a:t>
+            </a:r>
+          </a:p>
+        </p:txBody>
+      </p:sp>
+      <p:sp>
+        <p:nvSpPr>
+          <p:cNvPr id="17" name="Rectangle 16"/>
+          <p:cNvSpPr/>
+          <p:nvPr/>
+        </p:nvSpPr>
+        <p:spPr>
+          <a:xfrm>
+            <a:off x="548640" y="4160520"/>
+            <a:ext cx="3520440" cy="2011680"/>
+          </a:xfrm>
+          <a:prstGeom prst="rect">
+            <a:avLst/>
+          </a:prstGeom>
+          <a:solidFill>
+            <a:srgbClr val="F9FAFB"/>
+          </a:solidFill>
+          <a:ln>
+            <a:solidFill>
+              <a:srgbClr val="E5E7EB"/>
+            </a:solidFill>
+          </a:ln>
+        </p:spPr>
+        <p:style>
+          <a:lnRef idx="1">
+            <a:schemeClr val="accent1"/>
+          </a:lnRef>
+          <a:fillRef idx="3">
+            <a:schemeClr val="accent1"/>
+          </a:fillRef>
+          <a:effectRef idx="2">
+            <a:schemeClr val="accent1"/>
+          </a:effectRef>
+          <a:fontRef idx="minor">
+            <a:schemeClr val="lt1"/>
+          </a:fontRef>
+        </p:style>
+        <p:txBody>
+          <a:bodyPr rtlCol="0" anchor="ctr"/>
+          <a:lstStyle/>
+          <a:p>
+            <a:pPr algn="ctr"/>
+            <a:endParaRPr/>
+          </a:p>
+        </p:txBody>
+      </p:sp>
+      <p:sp>
+        <p:nvSpPr>
+          <p:cNvPr id="18" name="Rectangle 17"/>
+          <p:cNvSpPr/>
+          <p:nvPr/>
+        </p:nvSpPr>
+        <p:spPr>
+          <a:xfrm>
+            <a:off x="548640" y="4160520"/>
+            <a:ext cx="54864" cy="2011680"/>
           </a:xfrm>
           <a:prstGeom prst="rect">
             <a:avLst/>
@@ -7561,19 +7501,20 @@
           <a:lstStyle/>
           <a:p>
             <a:pPr algn="ctr"/>
-          </a:p>
-        </p:txBody>
-      </p:sp>
-      <p:sp>
-        <p:nvSpPr>
-          <p:cNvPr id="16" name="TextBox 15"/>
+            <a:endParaRPr/>
+          </a:p>
+        </p:txBody>
+      </p:sp>
+      <p:sp>
+        <p:nvSpPr>
+          <p:cNvPr id="19" name="TextBox 18"/>
           <p:cNvSpPr txBox="1"/>
           <p:nvPr/>
         </p:nvSpPr>
         <p:spPr>
           <a:xfrm>
-            <a:off x="6537960" y="4709160"/>
-            <a:ext cx="4937760" cy="914400"/>
+            <a:off x="685800" y="4297680"/>
+            <a:ext cx="3291840" cy="1737360"/>
           </a:xfrm>
           <a:prstGeom prst="rect">
             <a:avLst/>
@@ -7588,17 +7529,17 @@
           <a:p>
             <a:pPr>
               <a:spcAft>
-                <a:spcPts val="400"/>
+                <a:spcPts val="800"/>
               </a:spcAft>
-              <a:defRPr sz="1100" b="1">
-                <a:solidFill>
-                  <a:srgbClr val="86318E"/>
+              <a:defRPr sz="1150" b="1">
+                <a:solidFill>
+                  <a:srgbClr val="0D9488"/>
                 </a:solidFill>
                 <a:latin typeface="Arial"/>
               </a:defRPr>
             </a:pPr>
             <a:r>
-              <a:t>BOUCLE DE CAPITALISATION</a:t>
+              <a:t>AI AS AN ENABLER</a:t>
             </a:r>
           </a:p>
           <a:p>
@@ -7614,7 +7555,297 @@
               </a:defRPr>
             </a:pPr>
             <a:r>
-              <a:t>Chaque dossier résolu enrichit automatiquement le moteur de règles pour améliorer les futures détections.</a:t>
+              <a:t>L'IA ne remplace pas l'investigateur humain, elle pointe les anomalies pour accélérer sa prise de décision.</a:t>
+            </a:r>
+          </a:p>
+        </p:txBody>
+      </p:sp>
+      <p:sp>
+        <p:nvSpPr>
+          <p:cNvPr id="20" name="Rectangle 19"/>
+          <p:cNvSpPr/>
+          <p:nvPr/>
+        </p:nvSpPr>
+        <p:spPr>
+          <a:xfrm>
+            <a:off x="4334256" y="4160520"/>
+            <a:ext cx="3520440" cy="2011680"/>
+          </a:xfrm>
+          <a:prstGeom prst="rect">
+            <a:avLst/>
+          </a:prstGeom>
+          <a:solidFill>
+            <a:srgbClr val="F9FAFB"/>
+          </a:solidFill>
+          <a:ln>
+            <a:solidFill>
+              <a:srgbClr val="E5E7EB"/>
+            </a:solidFill>
+          </a:ln>
+        </p:spPr>
+        <p:style>
+          <a:lnRef idx="1">
+            <a:schemeClr val="accent1"/>
+          </a:lnRef>
+          <a:fillRef idx="3">
+            <a:schemeClr val="accent1"/>
+          </a:fillRef>
+          <a:effectRef idx="2">
+            <a:schemeClr val="accent1"/>
+          </a:effectRef>
+          <a:fontRef idx="minor">
+            <a:schemeClr val="lt1"/>
+          </a:fontRef>
+        </p:style>
+        <p:txBody>
+          <a:bodyPr rtlCol="0" anchor="ctr"/>
+          <a:lstStyle/>
+          <a:p>
+            <a:pPr algn="ctr"/>
+            <a:endParaRPr/>
+          </a:p>
+        </p:txBody>
+      </p:sp>
+      <p:sp>
+        <p:nvSpPr>
+          <p:cNvPr id="21" name="Rectangle 20"/>
+          <p:cNvSpPr/>
+          <p:nvPr/>
+        </p:nvSpPr>
+        <p:spPr>
+          <a:xfrm>
+            <a:off x="4334256" y="4160520"/>
+            <a:ext cx="54864" cy="2011680"/>
+          </a:xfrm>
+          <a:prstGeom prst="rect">
+            <a:avLst/>
+          </a:prstGeom>
+          <a:solidFill>
+            <a:srgbClr val="86318E"/>
+          </a:solidFill>
+          <a:ln>
+            <a:noFill/>
+          </a:ln>
+        </p:spPr>
+        <p:style>
+          <a:lnRef idx="1">
+            <a:schemeClr val="accent1"/>
+          </a:lnRef>
+          <a:fillRef idx="3">
+            <a:schemeClr val="accent1"/>
+          </a:fillRef>
+          <a:effectRef idx="2">
+            <a:schemeClr val="accent1"/>
+          </a:effectRef>
+          <a:fontRef idx="minor">
+            <a:schemeClr val="lt1"/>
+          </a:fontRef>
+        </p:style>
+        <p:txBody>
+          <a:bodyPr rtlCol="0" anchor="ctr"/>
+          <a:lstStyle/>
+          <a:p>
+            <a:pPr algn="ctr"/>
+            <a:endParaRPr/>
+          </a:p>
+        </p:txBody>
+      </p:sp>
+      <p:sp>
+        <p:nvSpPr>
+          <p:cNvPr id="22" name="TextBox 21"/>
+          <p:cNvSpPr txBox="1"/>
+          <p:nvPr/>
+        </p:nvSpPr>
+        <p:spPr>
+          <a:xfrm>
+            <a:off x="4471416" y="4297680"/>
+            <a:ext cx="3291840" cy="1737360"/>
+          </a:xfrm>
+          <a:prstGeom prst="rect">
+            <a:avLst/>
+          </a:prstGeom>
+          <a:noFill/>
+        </p:spPr>
+        <p:txBody>
+          <a:bodyPr wrap="square">
+            <a:spAutoFit/>
+          </a:bodyPr>
+          <a:lstStyle/>
+          <a:p>
+            <a:pPr>
+              <a:spcAft>
+                <a:spcPts val="800"/>
+              </a:spcAft>
+              <a:defRPr sz="1150" b="1">
+                <a:solidFill>
+                  <a:srgbClr val="86318E"/>
+                </a:solidFill>
+                <a:latin typeface="Arial"/>
+              </a:defRPr>
+            </a:pPr>
+            <a:r>
+              <a:t>EXPLAINABILITY BY DEFAULT</a:t>
+            </a:r>
+          </a:p>
+          <a:p>
+            <a:pPr>
+              <a:lnSpc>
+                <a:spcPct val="110000"/>
+              </a:lnSpc>
+              <a:defRPr sz="1000">
+                <a:solidFill>
+                  <a:srgbClr val="1F2937"/>
+                </a:solidFill>
+                <a:latin typeface="Calibri"/>
+              </a:defRPr>
+            </a:pPr>
+            <a:r>
+              <a:t>Aucune alerte de fraude n'est levée sans une justification lisible et opposable.</a:t>
+            </a:r>
+          </a:p>
+        </p:txBody>
+      </p:sp>
+      <p:sp>
+        <p:nvSpPr>
+          <p:cNvPr id="23" name="Rectangle 22"/>
+          <p:cNvSpPr/>
+          <p:nvPr/>
+        </p:nvSpPr>
+        <p:spPr>
+          <a:xfrm>
+            <a:off x="8119872" y="4160520"/>
+            <a:ext cx="3520440" cy="2011680"/>
+          </a:xfrm>
+          <a:prstGeom prst="rect">
+            <a:avLst/>
+          </a:prstGeom>
+          <a:solidFill>
+            <a:srgbClr val="F9FAFB"/>
+          </a:solidFill>
+          <a:ln>
+            <a:solidFill>
+              <a:srgbClr val="E5E7EB"/>
+            </a:solidFill>
+          </a:ln>
+        </p:spPr>
+        <p:style>
+          <a:lnRef idx="1">
+            <a:schemeClr val="accent1"/>
+          </a:lnRef>
+          <a:fillRef idx="3">
+            <a:schemeClr val="accent1"/>
+          </a:fillRef>
+          <a:effectRef idx="2">
+            <a:schemeClr val="accent1"/>
+          </a:effectRef>
+          <a:fontRef idx="minor">
+            <a:schemeClr val="lt1"/>
+          </a:fontRef>
+        </p:style>
+        <p:txBody>
+          <a:bodyPr rtlCol="0" anchor="ctr"/>
+          <a:lstStyle/>
+          <a:p>
+            <a:pPr algn="ctr"/>
+            <a:endParaRPr/>
+          </a:p>
+        </p:txBody>
+      </p:sp>
+      <p:sp>
+        <p:nvSpPr>
+          <p:cNvPr id="24" name="Rectangle 23"/>
+          <p:cNvSpPr/>
+          <p:nvPr/>
+        </p:nvSpPr>
+        <p:spPr>
+          <a:xfrm>
+            <a:off x="8119872" y="4160520"/>
+            <a:ext cx="54864" cy="2011680"/>
+          </a:xfrm>
+          <a:prstGeom prst="rect">
+            <a:avLst/>
+          </a:prstGeom>
+          <a:solidFill>
+            <a:srgbClr val="0D9488"/>
+          </a:solidFill>
+          <a:ln>
+            <a:noFill/>
+          </a:ln>
+        </p:spPr>
+        <p:style>
+          <a:lnRef idx="1">
+            <a:schemeClr val="accent1"/>
+          </a:lnRef>
+          <a:fillRef idx="3">
+            <a:schemeClr val="accent1"/>
+          </a:fillRef>
+          <a:effectRef idx="2">
+            <a:schemeClr val="accent1"/>
+          </a:effectRef>
+          <a:fontRef idx="minor">
+            <a:schemeClr val="lt1"/>
+          </a:fontRef>
+        </p:style>
+        <p:txBody>
+          <a:bodyPr rtlCol="0" anchor="ctr"/>
+          <a:lstStyle/>
+          <a:p>
+            <a:pPr algn="ctr"/>
+            <a:endParaRPr/>
+          </a:p>
+        </p:txBody>
+      </p:sp>
+      <p:sp>
+        <p:nvSpPr>
+          <p:cNvPr id="25" name="TextBox 24"/>
+          <p:cNvSpPr txBox="1"/>
+          <p:nvPr/>
+        </p:nvSpPr>
+        <p:spPr>
+          <a:xfrm>
+            <a:off x="8257032" y="4297680"/>
+            <a:ext cx="3291840" cy="1737360"/>
+          </a:xfrm>
+          <a:prstGeom prst="rect">
+            <a:avLst/>
+          </a:prstGeom>
+          <a:noFill/>
+        </p:spPr>
+        <p:txBody>
+          <a:bodyPr wrap="square">
+            <a:spAutoFit/>
+          </a:bodyPr>
+          <a:lstStyle/>
+          <a:p>
+            <a:pPr>
+              <a:spcAft>
+                <a:spcPts val="800"/>
+              </a:spcAft>
+              <a:defRPr sz="1150" b="1">
+                <a:solidFill>
+                  <a:srgbClr val="0D9488"/>
+                </a:solidFill>
+                <a:latin typeface="Arial"/>
+              </a:defRPr>
+            </a:pPr>
+            <a:r>
+              <a:t>SCALABLE PLATFORM</a:t>
+            </a:r>
+          </a:p>
+          <a:p>
+            <a:pPr>
+              <a:lnSpc>
+                <a:spcPct val="110000"/>
+              </a:lnSpc>
+              <a:defRPr sz="1000">
+                <a:solidFill>
+                  <a:srgbClr val="1F2937"/>
+                </a:solidFill>
+                <a:latin typeface="Calibri"/>
+              </a:defRPr>
+            </a:pPr>
+            <a:r>
+              <a:t>Architecture conçue pour traiter des volumes massifs de données historiques et temps réel de manière sécurisée.</a:t>
             </a:r>
           </a:p>
         </p:txBody>
@@ -7628,7 +7859,7 @@
 </file>
 
 <file path=ppt/slides/slide3.xml><?xml version="1.0" encoding="utf-8"?>
-<p:sld xmlns:a="http://schemas.openxmlformats.org/drawingml/2006/main" xmlns:p="http://schemas.openxmlformats.org/presentationml/2006/main" xmlns:r="http://schemas.openxmlformats.org/officeDocument/2006/relationships">
+<p:sld xmlns:a="http://schemas.openxmlformats.org/drawingml/2006/main" xmlns:r="http://schemas.openxmlformats.org/officeDocument/2006/relationships" xmlns:p="http://schemas.openxmlformats.org/presentationml/2006/main">
   <p:cSld>
     <p:spTree>
       <p:nvGrpSpPr>
@@ -7636,7 +7867,14 @@
         <p:cNvGrpSpPr/>
         <p:nvPr/>
       </p:nvGrpSpPr>
-      <p:grpSpPr/>
+      <p:grpSpPr>
+        <a:xfrm>
+          <a:off x="0" y="0"/>
+          <a:ext cx="0" cy="0"/>
+          <a:chOff x="0" y="0"/>
+          <a:chExt cx="0" cy="0"/>
+        </a:xfrm>
+      </p:grpSpPr>
       <p:sp>
         <p:nvSpPr>
           <p:cNvPr id="2" name="Rectangle 1"/>
@@ -7677,6 +7915,7 @@
           <a:lstStyle/>
           <a:p>
             <a:pPr algn="ctr"/>
+            <a:endParaRPr/>
           </a:p>
         </p:txBody>
       </p:sp>
@@ -7697,7 +7936,7 @@
           <a:noFill/>
         </p:spPr>
         <p:txBody>
-          <a:bodyPr wrap="square" lIns="0" tIns="0" bIns="0" rIns="0">
+          <a:bodyPr wrap="square" lIns="0" tIns="0" rIns="0" bIns="0">
             <a:spAutoFit/>
           </a:bodyPr>
           <a:lstStyle/>
@@ -7733,7 +7972,7 @@
           <a:noFill/>
         </p:spPr>
         <p:txBody>
-          <a:bodyPr wrap="square" lIns="0" tIns="0" bIns="0" rIns="0">
+          <a:bodyPr wrap="square" lIns="0" tIns="0" rIns="0" bIns="0">
             <a:spAutoFit/>
           </a:bodyPr>
           <a:lstStyle/>
@@ -7747,7 +7986,7 @@
               </a:defRPr>
             </a:pPr>
             <a:r>
-              <a:t>2. Product Blueprint &amp; Principes Directeurs</a:t>
+              <a:t>3. Architecture Technique &amp; Socle Commun</a:t>
             </a:r>
           </a:p>
         </p:txBody>
@@ -7792,6 +8031,7 @@
           <a:lstStyle/>
           <a:p>
             <a:pPr algn="ctr"/>
+            <a:endParaRPr/>
           </a:p>
         </p:txBody>
       </p:sp>
@@ -7812,7 +8052,7 @@
           <a:noFill/>
         </p:spPr>
         <p:txBody>
-          <a:bodyPr wrap="none" lIns="0" tIns="0" bIns="0" rIns="0">
+          <a:bodyPr wrap="none" lIns="0" tIns="0" rIns="0" bIns="0">
             <a:spAutoFit/>
           </a:bodyPr>
           <a:lstStyle/>
@@ -7826,57 +8066,21 @@
               </a:defRPr>
             </a:pPr>
             <a:r>
-              <a:t>Ekinox Consulting  |  Proposition de Transformation  |  Confidentialité SanlamAllianz  |  Slide 3</a:t>
-            </a:r>
-          </a:p>
-        </p:txBody>
-      </p:sp>
-      <p:sp>
-        <p:nvSpPr>
-          <p:cNvPr id="7" name="TextBox 6"/>
-          <p:cNvSpPr txBox="1"/>
-          <p:nvPr/>
-        </p:nvSpPr>
-        <p:spPr>
-          <a:xfrm>
-            <a:off x="548640" y="1371600"/>
-            <a:ext cx="11094415" cy="457200"/>
-          </a:xfrm>
-          <a:prstGeom prst="rect">
-            <a:avLst/>
-          </a:prstGeom>
-          <a:noFill/>
-        </p:spPr>
-        <p:txBody>
-          <a:bodyPr wrap="none" lIns="0" tIns="0" bIns="0" rIns="0">
-            <a:spAutoFit/>
-          </a:bodyPr>
-          <a:lstStyle/>
-          <a:p>
-            <a:pPr>
-              <a:defRPr sz="1100" i="1">
-                <a:solidFill>
-                  <a:srgbClr val="1F2937"/>
-                </a:solidFill>
-                <a:latin typeface="Calibri"/>
-              </a:defRPr>
-            </a:pPr>
-            <a:r>
-              <a:t>Le développement de la plateforme anti-fraude repose sur des principes clairs de traçabilité, d'aide à la décision et d'évolution modulaire.</a:t>
-            </a:r>
-          </a:p>
-        </p:txBody>
-      </p:sp>
-      <p:sp>
-        <p:nvSpPr>
-          <p:cNvPr id="8" name="Rectangle 7"/>
+              <a:t>Ekinox Consulting  |  Proposition de Transformation  |  Confidentialité SanlamAllianz  |  Slide 4</a:t>
+            </a:r>
+          </a:p>
+        </p:txBody>
+      </p:sp>
+      <p:sp>
+        <p:nvSpPr>
+          <p:cNvPr id="7" name="Rectangle 6"/>
           <p:cNvSpPr/>
           <p:nvPr/>
         </p:nvSpPr>
         <p:spPr>
           <a:xfrm>
-            <a:off x="548640" y="1920240"/>
-            <a:ext cx="3520440" cy="2011680"/>
+            <a:off x="548640" y="1645920"/>
+            <a:ext cx="5303520" cy="4389120"/>
           </a:xfrm>
           <a:prstGeom prst="rect">
             <a:avLst/>
@@ -7909,19 +8113,20 @@
           <a:lstStyle/>
           <a:p>
             <a:pPr algn="ctr"/>
-          </a:p>
-        </p:txBody>
-      </p:sp>
-      <p:sp>
-        <p:nvSpPr>
-          <p:cNvPr id="9" name="Rectangle 8"/>
+            <a:endParaRPr/>
+          </a:p>
+        </p:txBody>
+      </p:sp>
+      <p:sp>
+        <p:nvSpPr>
+          <p:cNvPr id="8" name="Rectangle 7"/>
           <p:cNvSpPr/>
           <p:nvPr/>
         </p:nvSpPr>
         <p:spPr>
           <a:xfrm>
-            <a:off x="548640" y="1920240"/>
-            <a:ext cx="54864" cy="2011680"/>
+            <a:off x="548640" y="1645920"/>
+            <a:ext cx="73152" cy="4389120"/>
           </a:xfrm>
           <a:prstGeom prst="rect">
             <a:avLst/>
@@ -7952,19 +8157,20 @@
           <a:lstStyle/>
           <a:p>
             <a:pPr algn="ctr"/>
-          </a:p>
-        </p:txBody>
-      </p:sp>
-      <p:sp>
-        <p:nvSpPr>
-          <p:cNvPr id="10" name="TextBox 9"/>
+            <a:endParaRPr/>
+          </a:p>
+        </p:txBody>
+      </p:sp>
+      <p:sp>
+        <p:nvSpPr>
+          <p:cNvPr id="9" name="TextBox 8"/>
           <p:cNvSpPr txBox="1"/>
           <p:nvPr/>
         </p:nvSpPr>
         <p:spPr>
           <a:xfrm>
-            <a:off x="685800" y="2057400"/>
-            <a:ext cx="3291840" cy="1737360"/>
+            <a:off x="731520" y="1828800"/>
+            <a:ext cx="4937760" cy="4023360"/>
           </a:xfrm>
           <a:prstGeom prst="rect">
             <a:avLst/>
@@ -7979,25 +8185,47 @@
           <a:p>
             <a:pPr>
               <a:spcAft>
+                <a:spcPts val="1400"/>
+              </a:spcAft>
+              <a:defRPr sz="1400" b="1">
+                <a:solidFill>
+                  <a:srgbClr val="86318E"/>
+                </a:solidFill>
+                <a:latin typeface="Arial"/>
+              </a:defRPr>
+            </a:pPr>
+            <a:r>
+              <a:t>ARCHITECTURE APPLICATIVE MODULAIRE</a:t>
+            </a:r>
+          </a:p>
+          <a:p>
+            <a:pPr>
+              <a:lnSpc>
+                <a:spcPct val="115000"/>
+              </a:lnSpc>
+              <a:spcAft>
                 <a:spcPts val="800"/>
               </a:spcAft>
-              <a:defRPr sz="1150" b="1">
-                <a:solidFill>
-                  <a:srgbClr val="86318E"/>
-                </a:solidFill>
-                <a:latin typeface="Arial"/>
-              </a:defRPr>
-            </a:pPr>
-            <a:r>
-              <a:t>BUSINESS FIRST</a:t>
+              <a:defRPr sz="1100">
+                <a:solidFill>
+                  <a:srgbClr val="1F2937"/>
+                </a:solidFill>
+                <a:latin typeface="Calibri"/>
+              </a:defRPr>
+            </a:pPr>
+            <a:r>
+              <a:t>Une plateforme de scoring et d'investigation, couplant des règles métier déterministes à des capacités d'analyse cognitive de données non structurées.</a:t>
             </a:r>
           </a:p>
           <a:p>
             <a:pPr>
               <a:lnSpc>
-                <a:spcPct val="110000"/>
+                <a:spcPct val="115000"/>
               </a:lnSpc>
-              <a:defRPr sz="1000">
+              <a:spcAft>
+                <a:spcPts val="800"/>
+              </a:spcAft>
+              <a:defRPr sz="1100">
                 <a:solidFill>
                   <a:srgbClr val="1F2937"/>
                 </a:solidFill>
@@ -8005,21 +8233,21 @@
               </a:defRPr>
             </a:pPr>
             <a:r>
-              <a:t>L'objectif principal est de réduire la charge sinistre et d'optimiser le temps des gestionnaires.</a:t>
-            </a:r>
-          </a:p>
-        </p:txBody>
-      </p:sp>
-      <p:sp>
-        <p:nvSpPr>
-          <p:cNvPr id="11" name="Rectangle 10"/>
+              <a:t>Intégration SI : Récupération asynchrone des données de sinistres, découplée de la chaîne de paiement critique en MVP.</a:t>
+            </a:r>
+          </a:p>
+        </p:txBody>
+      </p:sp>
+      <p:sp>
+        <p:nvSpPr>
+          <p:cNvPr id="10" name="Rectangle 9"/>
           <p:cNvSpPr/>
           <p:nvPr/>
         </p:nvSpPr>
         <p:spPr>
           <a:xfrm>
-            <a:off x="4334256" y="1920240"/>
-            <a:ext cx="3520440" cy="2011680"/>
+            <a:off x="6339535" y="1645920"/>
+            <a:ext cx="5303520" cy="4389120"/>
           </a:xfrm>
           <a:prstGeom prst="rect">
             <a:avLst/>
@@ -8052,19 +8280,20 @@
           <a:lstStyle/>
           <a:p>
             <a:pPr algn="ctr"/>
-          </a:p>
-        </p:txBody>
-      </p:sp>
-      <p:sp>
-        <p:nvSpPr>
-          <p:cNvPr id="12" name="Rectangle 11"/>
+            <a:endParaRPr/>
+          </a:p>
+        </p:txBody>
+      </p:sp>
+      <p:sp>
+        <p:nvSpPr>
+          <p:cNvPr id="11" name="Rectangle 10"/>
           <p:cNvSpPr/>
           <p:nvPr/>
         </p:nvSpPr>
         <p:spPr>
           <a:xfrm>
-            <a:off x="4334256" y="1920240"/>
-            <a:ext cx="54864" cy="2011680"/>
+            <a:off x="6339535" y="1645920"/>
+            <a:ext cx="73152" cy="4389120"/>
           </a:xfrm>
           <a:prstGeom prst="rect">
             <a:avLst/>
@@ -8095,19 +8324,20 @@
           <a:lstStyle/>
           <a:p>
             <a:pPr algn="ctr"/>
-          </a:p>
-        </p:txBody>
-      </p:sp>
-      <p:sp>
-        <p:nvSpPr>
-          <p:cNvPr id="13" name="TextBox 12"/>
+            <a:endParaRPr/>
+          </a:p>
+        </p:txBody>
+      </p:sp>
+      <p:sp>
+        <p:nvSpPr>
+          <p:cNvPr id="12" name="TextBox 11"/>
           <p:cNvSpPr txBox="1"/>
           <p:nvPr/>
         </p:nvSpPr>
         <p:spPr>
           <a:xfrm>
-            <a:off x="4471416" y="2057400"/>
-            <a:ext cx="3291840" cy="1737360"/>
+            <a:off x="6522415" y="1828800"/>
+            <a:ext cx="4937760" cy="4023360"/>
           </a:xfrm>
           <a:prstGeom prst="rect">
             <a:avLst/>
@@ -8122,9 +8352,9 @@
           <a:p>
             <a:pPr>
               <a:spcAft>
-                <a:spcPts val="800"/>
+                <a:spcPts val="1400"/>
               </a:spcAft>
-              <a:defRPr sz="1150" b="1">
+              <a:defRPr sz="1400" b="1">
                 <a:solidFill>
                   <a:srgbClr val="0D9488"/>
                 </a:solidFill>
@@ -8132,7 +8362,7 @@
               </a:defRPr>
             </a:pPr>
             <a:r>
-              <a:t>API-READY</a:t>
+              <a:t>COMPOSANTS TECHNOLOGIQUES CLÉS</a:t>
             </a:r>
           </a:p>
           <a:p>
@@ -8140,7 +8370,10 @@
               <a:lnSpc>
                 <a:spcPct val="110000"/>
               </a:lnSpc>
-              <a:defRPr sz="1000">
+              <a:spcAft>
+                <a:spcPts val="600"/>
+              </a:spcAft>
+              <a:defRPr sz="1050">
                 <a:solidFill>
                   <a:srgbClr val="1F2937"/>
                 </a:solidFill>
@@ -8148,579 +8381,7 @@
               </a:defRPr>
             </a:pPr>
             <a:r>
-              <a:t>Capacité à ingérer des flux de sinistres en temps réel ou en batch depuis les systèmes core de gestion.</a:t>
-            </a:r>
-          </a:p>
-        </p:txBody>
-      </p:sp>
-      <p:sp>
-        <p:nvSpPr>
-          <p:cNvPr id="14" name="Rectangle 13"/>
-          <p:cNvSpPr/>
-          <p:nvPr/>
-        </p:nvSpPr>
-        <p:spPr>
-          <a:xfrm>
-            <a:off x="8119872" y="1920240"/>
-            <a:ext cx="3520440" cy="2011680"/>
-          </a:xfrm>
-          <a:prstGeom prst="rect">
-            <a:avLst/>
-          </a:prstGeom>
-          <a:solidFill>
-            <a:srgbClr val="F9FAFB"/>
-          </a:solidFill>
-          <a:ln>
-            <a:solidFill>
-              <a:srgbClr val="E5E7EB"/>
-            </a:solidFill>
-          </a:ln>
-        </p:spPr>
-        <p:style>
-          <a:lnRef idx="1">
-            <a:schemeClr val="accent1"/>
-          </a:lnRef>
-          <a:fillRef idx="3">
-            <a:schemeClr val="accent1"/>
-          </a:fillRef>
-          <a:effectRef idx="2">
-            <a:schemeClr val="accent1"/>
-          </a:effectRef>
-          <a:fontRef idx="minor">
-            <a:schemeClr val="lt1"/>
-          </a:fontRef>
-        </p:style>
-        <p:txBody>
-          <a:bodyPr rtlCol="0" anchor="ctr"/>
-          <a:lstStyle/>
-          <a:p>
-            <a:pPr algn="ctr"/>
-          </a:p>
-        </p:txBody>
-      </p:sp>
-      <p:sp>
-        <p:nvSpPr>
-          <p:cNvPr id="15" name="Rectangle 14"/>
-          <p:cNvSpPr/>
-          <p:nvPr/>
-        </p:nvSpPr>
-        <p:spPr>
-          <a:xfrm>
-            <a:off x="8119872" y="1920240"/>
-            <a:ext cx="54864" cy="2011680"/>
-          </a:xfrm>
-          <a:prstGeom prst="rect">
-            <a:avLst/>
-          </a:prstGeom>
-          <a:solidFill>
-            <a:srgbClr val="86318E"/>
-          </a:solidFill>
-          <a:ln>
-            <a:noFill/>
-          </a:ln>
-        </p:spPr>
-        <p:style>
-          <a:lnRef idx="1">
-            <a:schemeClr val="accent1"/>
-          </a:lnRef>
-          <a:fillRef idx="3">
-            <a:schemeClr val="accent1"/>
-          </a:fillRef>
-          <a:effectRef idx="2">
-            <a:schemeClr val="accent1"/>
-          </a:effectRef>
-          <a:fontRef idx="minor">
-            <a:schemeClr val="lt1"/>
-          </a:fontRef>
-        </p:style>
-        <p:txBody>
-          <a:bodyPr rtlCol="0" anchor="ctr"/>
-          <a:lstStyle/>
-          <a:p>
-            <a:pPr algn="ctr"/>
-          </a:p>
-        </p:txBody>
-      </p:sp>
-      <p:sp>
-        <p:nvSpPr>
-          <p:cNvPr id="16" name="TextBox 15"/>
-          <p:cNvSpPr txBox="1"/>
-          <p:nvPr/>
-        </p:nvSpPr>
-        <p:spPr>
-          <a:xfrm>
-            <a:off x="8257032" y="2057400"/>
-            <a:ext cx="3291840" cy="1737360"/>
-          </a:xfrm>
-          <a:prstGeom prst="rect">
-            <a:avLst/>
-          </a:prstGeom>
-          <a:noFill/>
-        </p:spPr>
-        <p:txBody>
-          <a:bodyPr wrap="square">
-            <a:spAutoFit/>
-          </a:bodyPr>
-          <a:lstStyle/>
-          <a:p>
-            <a:pPr>
-              <a:spcAft>
-                <a:spcPts val="800"/>
-              </a:spcAft>
-              <a:defRPr sz="1150" b="1">
-                <a:solidFill>
-                  <a:srgbClr val="86318E"/>
-                </a:solidFill>
-                <a:latin typeface="Arial"/>
-              </a:defRPr>
-            </a:pPr>
-            <a:r>
-              <a:t>MVP BY DESIGN</a:t>
-            </a:r>
-          </a:p>
-          <a:p>
-            <a:pPr>
-              <a:lnSpc>
-                <a:spcPct val="110000"/>
-              </a:lnSpc>
-              <a:defRPr sz="1000">
-                <a:solidFill>
-                  <a:srgbClr val="1F2937"/>
-                </a:solidFill>
-                <a:latin typeface="Calibri"/>
-              </a:defRPr>
-            </a:pPr>
-            <a:r>
-              <a:t>Concentration initiale sur les lignes d'affaires les plus à risque (ex: Auto) avant extension globale.</a:t>
-            </a:r>
-          </a:p>
-        </p:txBody>
-      </p:sp>
-      <p:sp>
-        <p:nvSpPr>
-          <p:cNvPr id="17" name="Rectangle 16"/>
-          <p:cNvSpPr/>
-          <p:nvPr/>
-        </p:nvSpPr>
-        <p:spPr>
-          <a:xfrm>
-            <a:off x="548640" y="4160520"/>
-            <a:ext cx="3520440" cy="2011680"/>
-          </a:xfrm>
-          <a:prstGeom prst="rect">
-            <a:avLst/>
-          </a:prstGeom>
-          <a:solidFill>
-            <a:srgbClr val="F9FAFB"/>
-          </a:solidFill>
-          <a:ln>
-            <a:solidFill>
-              <a:srgbClr val="E5E7EB"/>
-            </a:solidFill>
-          </a:ln>
-        </p:spPr>
-        <p:style>
-          <a:lnRef idx="1">
-            <a:schemeClr val="accent1"/>
-          </a:lnRef>
-          <a:fillRef idx="3">
-            <a:schemeClr val="accent1"/>
-          </a:fillRef>
-          <a:effectRef idx="2">
-            <a:schemeClr val="accent1"/>
-          </a:effectRef>
-          <a:fontRef idx="minor">
-            <a:schemeClr val="lt1"/>
-          </a:fontRef>
-        </p:style>
-        <p:txBody>
-          <a:bodyPr rtlCol="0" anchor="ctr"/>
-          <a:lstStyle/>
-          <a:p>
-            <a:pPr algn="ctr"/>
-          </a:p>
-        </p:txBody>
-      </p:sp>
-      <p:sp>
-        <p:nvSpPr>
-          <p:cNvPr id="18" name="Rectangle 17"/>
-          <p:cNvSpPr/>
-          <p:nvPr/>
-        </p:nvSpPr>
-        <p:spPr>
-          <a:xfrm>
-            <a:off x="548640" y="4160520"/>
-            <a:ext cx="54864" cy="2011680"/>
-          </a:xfrm>
-          <a:prstGeom prst="rect">
-            <a:avLst/>
-          </a:prstGeom>
-          <a:solidFill>
-            <a:srgbClr val="0D9488"/>
-          </a:solidFill>
-          <a:ln>
-            <a:noFill/>
-          </a:ln>
-        </p:spPr>
-        <p:style>
-          <a:lnRef idx="1">
-            <a:schemeClr val="accent1"/>
-          </a:lnRef>
-          <a:fillRef idx="3">
-            <a:schemeClr val="accent1"/>
-          </a:fillRef>
-          <a:effectRef idx="2">
-            <a:schemeClr val="accent1"/>
-          </a:effectRef>
-          <a:fontRef idx="minor">
-            <a:schemeClr val="lt1"/>
-          </a:fontRef>
-        </p:style>
-        <p:txBody>
-          <a:bodyPr rtlCol="0" anchor="ctr"/>
-          <a:lstStyle/>
-          <a:p>
-            <a:pPr algn="ctr"/>
-          </a:p>
-        </p:txBody>
-      </p:sp>
-      <p:sp>
-        <p:nvSpPr>
-          <p:cNvPr id="19" name="TextBox 18"/>
-          <p:cNvSpPr txBox="1"/>
-          <p:nvPr/>
-        </p:nvSpPr>
-        <p:spPr>
-          <a:xfrm>
-            <a:off x="685800" y="4297680"/>
-            <a:ext cx="3291840" cy="1737360"/>
-          </a:xfrm>
-          <a:prstGeom prst="rect">
-            <a:avLst/>
-          </a:prstGeom>
-          <a:noFill/>
-        </p:spPr>
-        <p:txBody>
-          <a:bodyPr wrap="square">
-            <a:spAutoFit/>
-          </a:bodyPr>
-          <a:lstStyle/>
-          <a:p>
-            <a:pPr>
-              <a:spcAft>
-                <a:spcPts val="800"/>
-              </a:spcAft>
-              <a:defRPr sz="1150" b="1">
-                <a:solidFill>
-                  <a:srgbClr val="0D9488"/>
-                </a:solidFill>
-                <a:latin typeface="Arial"/>
-              </a:defRPr>
-            </a:pPr>
-            <a:r>
-              <a:t>AI AS AN ENABLER</a:t>
-            </a:r>
-          </a:p>
-          <a:p>
-            <a:pPr>
-              <a:lnSpc>
-                <a:spcPct val="110000"/>
-              </a:lnSpc>
-              <a:defRPr sz="1000">
-                <a:solidFill>
-                  <a:srgbClr val="1F2937"/>
-                </a:solidFill>
-                <a:latin typeface="Calibri"/>
-              </a:defRPr>
-            </a:pPr>
-            <a:r>
-              <a:t>L'IA ne remplace pas l'investigateur humain, elle pointe les anomalies pour accélérer sa prise de décision.</a:t>
-            </a:r>
-          </a:p>
-        </p:txBody>
-      </p:sp>
-      <p:sp>
-        <p:nvSpPr>
-          <p:cNvPr id="20" name="Rectangle 19"/>
-          <p:cNvSpPr/>
-          <p:nvPr/>
-        </p:nvSpPr>
-        <p:spPr>
-          <a:xfrm>
-            <a:off x="4334256" y="4160520"/>
-            <a:ext cx="3520440" cy="2011680"/>
-          </a:xfrm>
-          <a:prstGeom prst="rect">
-            <a:avLst/>
-          </a:prstGeom>
-          <a:solidFill>
-            <a:srgbClr val="F9FAFB"/>
-          </a:solidFill>
-          <a:ln>
-            <a:solidFill>
-              <a:srgbClr val="E5E7EB"/>
-            </a:solidFill>
-          </a:ln>
-        </p:spPr>
-        <p:style>
-          <a:lnRef idx="1">
-            <a:schemeClr val="accent1"/>
-          </a:lnRef>
-          <a:fillRef idx="3">
-            <a:schemeClr val="accent1"/>
-          </a:fillRef>
-          <a:effectRef idx="2">
-            <a:schemeClr val="accent1"/>
-          </a:effectRef>
-          <a:fontRef idx="minor">
-            <a:schemeClr val="lt1"/>
-          </a:fontRef>
-        </p:style>
-        <p:txBody>
-          <a:bodyPr rtlCol="0" anchor="ctr"/>
-          <a:lstStyle/>
-          <a:p>
-            <a:pPr algn="ctr"/>
-          </a:p>
-        </p:txBody>
-      </p:sp>
-      <p:sp>
-        <p:nvSpPr>
-          <p:cNvPr id="21" name="Rectangle 20"/>
-          <p:cNvSpPr/>
-          <p:nvPr/>
-        </p:nvSpPr>
-        <p:spPr>
-          <a:xfrm>
-            <a:off x="4334256" y="4160520"/>
-            <a:ext cx="54864" cy="2011680"/>
-          </a:xfrm>
-          <a:prstGeom prst="rect">
-            <a:avLst/>
-          </a:prstGeom>
-          <a:solidFill>
-            <a:srgbClr val="86318E"/>
-          </a:solidFill>
-          <a:ln>
-            <a:noFill/>
-          </a:ln>
-        </p:spPr>
-        <p:style>
-          <a:lnRef idx="1">
-            <a:schemeClr val="accent1"/>
-          </a:lnRef>
-          <a:fillRef idx="3">
-            <a:schemeClr val="accent1"/>
-          </a:fillRef>
-          <a:effectRef idx="2">
-            <a:schemeClr val="accent1"/>
-          </a:effectRef>
-          <a:fontRef idx="minor">
-            <a:schemeClr val="lt1"/>
-          </a:fontRef>
-        </p:style>
-        <p:txBody>
-          <a:bodyPr rtlCol="0" anchor="ctr"/>
-          <a:lstStyle/>
-          <a:p>
-            <a:pPr algn="ctr"/>
-          </a:p>
-        </p:txBody>
-      </p:sp>
-      <p:sp>
-        <p:nvSpPr>
-          <p:cNvPr id="22" name="TextBox 21"/>
-          <p:cNvSpPr txBox="1"/>
-          <p:nvPr/>
-        </p:nvSpPr>
-        <p:spPr>
-          <a:xfrm>
-            <a:off x="4471416" y="4297680"/>
-            <a:ext cx="3291840" cy="1737360"/>
-          </a:xfrm>
-          <a:prstGeom prst="rect">
-            <a:avLst/>
-          </a:prstGeom>
-          <a:noFill/>
-        </p:spPr>
-        <p:txBody>
-          <a:bodyPr wrap="square">
-            <a:spAutoFit/>
-          </a:bodyPr>
-          <a:lstStyle/>
-          <a:p>
-            <a:pPr>
-              <a:spcAft>
-                <a:spcPts val="800"/>
-              </a:spcAft>
-              <a:defRPr sz="1150" b="1">
-                <a:solidFill>
-                  <a:srgbClr val="86318E"/>
-                </a:solidFill>
-                <a:latin typeface="Arial"/>
-              </a:defRPr>
-            </a:pPr>
-            <a:r>
-              <a:t>EXPLAINABILITY BY DEFAULT</a:t>
-            </a:r>
-          </a:p>
-          <a:p>
-            <a:pPr>
-              <a:lnSpc>
-                <a:spcPct val="110000"/>
-              </a:lnSpc>
-              <a:defRPr sz="1000">
-                <a:solidFill>
-                  <a:srgbClr val="1F2937"/>
-                </a:solidFill>
-                <a:latin typeface="Calibri"/>
-              </a:defRPr>
-            </a:pPr>
-            <a:r>
-              <a:t>Aucune alerte de fraude n'est levée sans une justification lisible et opposable.</a:t>
-            </a:r>
-          </a:p>
-        </p:txBody>
-      </p:sp>
-      <p:sp>
-        <p:nvSpPr>
-          <p:cNvPr id="23" name="Rectangle 22"/>
-          <p:cNvSpPr/>
-          <p:nvPr/>
-        </p:nvSpPr>
-        <p:spPr>
-          <a:xfrm>
-            <a:off x="8119872" y="4160520"/>
-            <a:ext cx="3520440" cy="2011680"/>
-          </a:xfrm>
-          <a:prstGeom prst="rect">
-            <a:avLst/>
-          </a:prstGeom>
-          <a:solidFill>
-            <a:srgbClr val="F9FAFB"/>
-          </a:solidFill>
-          <a:ln>
-            <a:solidFill>
-              <a:srgbClr val="E5E7EB"/>
-            </a:solidFill>
-          </a:ln>
-        </p:spPr>
-        <p:style>
-          <a:lnRef idx="1">
-            <a:schemeClr val="accent1"/>
-          </a:lnRef>
-          <a:fillRef idx="3">
-            <a:schemeClr val="accent1"/>
-          </a:fillRef>
-          <a:effectRef idx="2">
-            <a:schemeClr val="accent1"/>
-          </a:effectRef>
-          <a:fontRef idx="minor">
-            <a:schemeClr val="lt1"/>
-          </a:fontRef>
-        </p:style>
-        <p:txBody>
-          <a:bodyPr rtlCol="0" anchor="ctr"/>
-          <a:lstStyle/>
-          <a:p>
-            <a:pPr algn="ctr"/>
-          </a:p>
-        </p:txBody>
-      </p:sp>
-      <p:sp>
-        <p:nvSpPr>
-          <p:cNvPr id="24" name="Rectangle 23"/>
-          <p:cNvSpPr/>
-          <p:nvPr/>
-        </p:nvSpPr>
-        <p:spPr>
-          <a:xfrm>
-            <a:off x="8119872" y="4160520"/>
-            <a:ext cx="54864" cy="2011680"/>
-          </a:xfrm>
-          <a:prstGeom prst="rect">
-            <a:avLst/>
-          </a:prstGeom>
-          <a:solidFill>
-            <a:srgbClr val="0D9488"/>
-          </a:solidFill>
-          <a:ln>
-            <a:noFill/>
-          </a:ln>
-        </p:spPr>
-        <p:style>
-          <a:lnRef idx="1">
-            <a:schemeClr val="accent1"/>
-          </a:lnRef>
-          <a:fillRef idx="3">
-            <a:schemeClr val="accent1"/>
-          </a:fillRef>
-          <a:effectRef idx="2">
-            <a:schemeClr val="accent1"/>
-          </a:effectRef>
-          <a:fontRef idx="minor">
-            <a:schemeClr val="lt1"/>
-          </a:fontRef>
-        </p:style>
-        <p:txBody>
-          <a:bodyPr rtlCol="0" anchor="ctr"/>
-          <a:lstStyle/>
-          <a:p>
-            <a:pPr algn="ctr"/>
-          </a:p>
-        </p:txBody>
-      </p:sp>
-      <p:sp>
-        <p:nvSpPr>
-          <p:cNvPr id="25" name="TextBox 24"/>
-          <p:cNvSpPr txBox="1"/>
-          <p:nvPr/>
-        </p:nvSpPr>
-        <p:spPr>
-          <a:xfrm>
-            <a:off x="8257032" y="4297680"/>
-            <a:ext cx="3291840" cy="1737360"/>
-          </a:xfrm>
-          <a:prstGeom prst="rect">
-            <a:avLst/>
-          </a:prstGeom>
-          <a:noFill/>
-        </p:spPr>
-        <p:txBody>
-          <a:bodyPr wrap="square">
-            <a:spAutoFit/>
-          </a:bodyPr>
-          <a:lstStyle/>
-          <a:p>
-            <a:pPr>
-              <a:spcAft>
-                <a:spcPts val="800"/>
-              </a:spcAft>
-              <a:defRPr sz="1150" b="1">
-                <a:solidFill>
-                  <a:srgbClr val="0D9488"/>
-                </a:solidFill>
-                <a:latin typeface="Arial"/>
-              </a:defRPr>
-            </a:pPr>
-            <a:r>
-              <a:t>SCALABLE PLATFORM</a:t>
-            </a:r>
-          </a:p>
-          <a:p>
-            <a:pPr>
-              <a:lnSpc>
-                <a:spcPct val="110000"/>
-              </a:lnSpc>
-              <a:defRPr sz="1000">
-                <a:solidFill>
-                  <a:srgbClr val="1F2937"/>
-                </a:solidFill>
-                <a:latin typeface="Calibri"/>
-              </a:defRPr>
-            </a:pPr>
-            <a:r>
-              <a:t>Architecture conçue pour traiter des volumes massifs de données historiques et temps réel de manière sécurisée.</a:t>
+              <a:t>Moteur de scoring hybride, Interface d'investigation métier, Base de connaissances fraude, Module d'explicabilité.</a:t>
             </a:r>
           </a:p>
         </p:txBody>
@@ -8734,7 +8395,7 @@
 </file>
 
 <file path=ppt/slides/slide4.xml><?xml version="1.0" encoding="utf-8"?>
-<p:sld xmlns:a="http://schemas.openxmlformats.org/drawingml/2006/main" xmlns:p="http://schemas.openxmlformats.org/presentationml/2006/main" xmlns:r="http://schemas.openxmlformats.org/officeDocument/2006/relationships">
+<p:sld xmlns:a="http://schemas.openxmlformats.org/drawingml/2006/main" xmlns:r="http://schemas.openxmlformats.org/officeDocument/2006/relationships" xmlns:p="http://schemas.openxmlformats.org/presentationml/2006/main">
   <p:cSld>
     <p:spTree>
       <p:nvGrpSpPr>
@@ -8742,7 +8403,14 @@
         <p:cNvGrpSpPr/>
         <p:nvPr/>
       </p:nvGrpSpPr>
-      <p:grpSpPr/>
+      <p:grpSpPr>
+        <a:xfrm>
+          <a:off x="0" y="0"/>
+          <a:ext cx="0" cy="0"/>
+          <a:chOff x="0" y="0"/>
+          <a:chExt cx="0" cy="0"/>
+        </a:xfrm>
+      </p:grpSpPr>
       <p:sp>
         <p:nvSpPr>
           <p:cNvPr id="2" name="Rectangle 1"/>
@@ -8783,6 +8451,7 @@
           <a:lstStyle/>
           <a:p>
             <a:pPr algn="ctr"/>
+            <a:endParaRPr/>
           </a:p>
         </p:txBody>
       </p:sp>
@@ -8803,7 +8472,7 @@
           <a:noFill/>
         </p:spPr>
         <p:txBody>
-          <a:bodyPr wrap="square" lIns="0" tIns="0" bIns="0" rIns="0">
+          <a:bodyPr wrap="square" lIns="0" tIns="0" rIns="0" bIns="0">
             <a:spAutoFit/>
           </a:bodyPr>
           <a:lstStyle/>
@@ -8839,7 +8508,7 @@
           <a:noFill/>
         </p:spPr>
         <p:txBody>
-          <a:bodyPr wrap="square" lIns="0" tIns="0" bIns="0" rIns="0">
+          <a:bodyPr wrap="square" lIns="0" tIns="0" rIns="0" bIns="0">
             <a:spAutoFit/>
           </a:bodyPr>
           <a:lstStyle/>
@@ -8853,7 +8522,7 @@
               </a:defRPr>
             </a:pPr>
             <a:r>
-              <a:t>3. Architecture Technique &amp; Socle Commun</a:t>
+              <a:t>4.1 Capacité : Fraud Knowledge Base</a:t>
             </a:r>
           </a:p>
         </p:txBody>
@@ -8898,6 +8567,7 @@
           <a:lstStyle/>
           <a:p>
             <a:pPr algn="ctr"/>
+            <a:endParaRPr/>
           </a:p>
         </p:txBody>
       </p:sp>
@@ -8918,7 +8588,7 @@
           <a:noFill/>
         </p:spPr>
         <p:txBody>
-          <a:bodyPr wrap="none" lIns="0" tIns="0" bIns="0" rIns="0">
+          <a:bodyPr wrap="none" lIns="0" tIns="0" rIns="0" bIns="0">
             <a:spAutoFit/>
           </a:bodyPr>
           <a:lstStyle/>
@@ -8932,7 +8602,7 @@
               </a:defRPr>
             </a:pPr>
             <a:r>
-              <a:t>Ekinox Consulting  |  Proposition de Transformation  |  Confidentialité SanlamAllianz  |  Slide 4</a:t>
+              <a:t>Ekinox Consulting  |  Proposition de Transformation  |  Confidentialité SanlamAllianz  |  Slide 5</a:t>
             </a:r>
           </a:p>
         </p:txBody>
@@ -8979,6 +8649,7 @@
           <a:lstStyle/>
           <a:p>
             <a:pPr algn="ctr"/>
+            <a:endParaRPr/>
           </a:p>
         </p:txBody>
       </p:sp>
@@ -9022,6 +8693,7 @@
           <a:lstStyle/>
           <a:p>
             <a:pPr algn="ctr"/>
+            <a:endParaRPr/>
           </a:p>
         </p:txBody>
       </p:sp>
@@ -9059,7 +8731,7 @@
               </a:defRPr>
             </a:pPr>
             <a:r>
-              <a:t>ARCHITECTURE APPLICATIVE MODULAIRE</a:t>
+              <a:t>CADRAGE CLIENT &amp; VALEUR MÉTIER</a:t>
             </a:r>
           </a:p>
           <a:p>
@@ -9078,7 +8750,11 @@
               </a:defRPr>
             </a:pPr>
             <a:r>
-              <a:t>Une plateforme de scoring et d'investigation, couplant des règles métier déterministes à des capacités d'analyse cognitive de données non structurées.</a:t>
+              <a:t>Vision &amp; Objectif :</a:t>
+            </a:r>
+            <a:br/>
+            <a:r>
+              <a:t>La mémoire institutionnelle de lutte anti-fraude, digitalisée et accessible.</a:t>
             </a:r>
           </a:p>
           <a:p>
@@ -9097,7 +8773,57 @@
               </a:defRPr>
             </a:pPr>
             <a:r>
-              <a:t>Intégration SI : Récupération asynchrone des données de sinistres, découplée de la chaîne de paiement critique en MVP.</a:t>
+              <a:t>Valeur Métier :</a:t>
+            </a:r>
+            <a:br/>
+            <a:r>
+              <a:t>Centralise les schémas de fraude connus, les modus operandi et les cas de jurisprudence.</a:t>
+            </a:r>
+          </a:p>
+          <a:p>
+            <a:pPr>
+              <a:lnSpc>
+                <a:spcPct val="115000"/>
+              </a:lnSpc>
+              <a:spcAft>
+                <a:spcPts val="800"/>
+              </a:spcAft>
+              <a:defRPr sz="1100">
+                <a:solidFill>
+                  <a:srgbClr val="1F2937"/>
+                </a:solidFill>
+                <a:latin typeface="Calibri"/>
+              </a:defRPr>
+            </a:pPr>
+            <a:r>
+              <a:t>Cas d'Usage Enquêteur :</a:t>
+            </a:r>
+            <a:br/>
+            <a:r>
+              <a:t>Lorsqu'un nouveau type d'arnaque au bris de glace est identifié, il est documenté et sert de référence pour la détection future.</a:t>
+            </a:r>
+          </a:p>
+          <a:p>
+            <a:pPr>
+              <a:lnSpc>
+                <a:spcPct val="115000"/>
+              </a:lnSpc>
+              <a:spcAft>
+                <a:spcPts val="800"/>
+              </a:spcAft>
+              <a:defRPr sz="1100">
+                <a:solidFill>
+                  <a:srgbClr val="1F2937"/>
+                </a:solidFill>
+                <a:latin typeface="Calibri"/>
+              </a:defRPr>
+            </a:pPr>
+            <a:r>
+              <a:t>Impact Utilisateur :</a:t>
+            </a:r>
+            <a:br/>
+            <a:r>
+              <a:t>Augmentation immédiate du niveau de compétence de tous les gestionnaires face à des fraudes complexes.</a:t>
             </a:r>
           </a:p>
         </p:txBody>
@@ -9144,6 +8870,7 @@
           <a:lstStyle/>
           <a:p>
             <a:pPr algn="ctr"/>
+            <a:endParaRPr/>
           </a:p>
         </p:txBody>
       </p:sp>
@@ -9187,6 +8914,7 @@
           <a:lstStyle/>
           <a:p>
             <a:pPr algn="ctr"/>
+            <a:endParaRPr/>
           </a:p>
         </p:txBody>
       </p:sp>
@@ -9224,7 +8952,7 @@
               </a:defRPr>
             </a:pPr>
             <a:r>
-              <a:t>COMPOSANTS TECHNOLOGIQUES CLÉS</a:t>
+              <a:t>FICHE IMPLÉMENTATION INTERNE (MVP)</a:t>
             </a:r>
           </a:p>
           <a:p>
@@ -9243,7 +8971,80 @@
               </a:defRPr>
             </a:pPr>
             <a:r>
-              <a:t>Moteur de scoring hybride, Interface d'investigation métier, Base de connaissances fraude, Module d'explicabilité.</a:t>
+              <a:t>Données Nécessaires MVP :</a:t>
+            </a:r>
+            <a:br/>
+            <a:r>
+              <a:t>Historique des cas avérés de fraude, fiches de typologies de fraude, rapports d'experts.</a:t>
+            </a:r>
+          </a:p>
+          <a:p>
+            <a:pPr>
+              <a:lnSpc>
+                <a:spcPct val="110000"/>
+              </a:lnSpc>
+              <a:spcAft>
+                <a:spcPts val="600"/>
+              </a:spcAft>
+              <a:defRPr sz="1050">
+                <a:solidFill>
+                  <a:srgbClr val="1F2937"/>
+                </a:solidFill>
+                <a:latin typeface="Calibri"/>
+              </a:defRPr>
+            </a:pPr>
+            <a:r>
+              <a:t>Stack Technique MVP :</a:t>
+            </a:r>
+            <a:br/>
+            <a:r>
+              <a:t>Système de gestion de contenu structuré, moteur de recherche sémantique.</a:t>
+            </a:r>
+          </a:p>
+          <a:p>
+            <a:pPr>
+              <a:lnSpc>
+                <a:spcPct val="110000"/>
+              </a:lnSpc>
+              <a:spcAft>
+                <a:spcPts val="600"/>
+              </a:spcAft>
+              <a:defRPr sz="1050">
+                <a:solidFill>
+                  <a:srgbClr val="1F2937"/>
+                </a:solidFill>
+                <a:latin typeface="Calibri"/>
+              </a:defRPr>
+            </a:pPr>
+            <a:r>
+              <a:t>APIs &amp; Services :</a:t>
+            </a:r>
+            <a:br/>
+            <a:r>
+              <a:t>API de recherche de typologies, API d'ajout de cas de référence.</a:t>
+            </a:r>
+          </a:p>
+          <a:p>
+            <a:pPr>
+              <a:lnSpc>
+                <a:spcPct val="110000"/>
+              </a:lnSpc>
+              <a:spcAft>
+                <a:spcPts val="600"/>
+              </a:spcAft>
+              <a:defRPr sz="1050">
+                <a:solidFill>
+                  <a:srgbClr val="1F2937"/>
+                </a:solidFill>
+                <a:latin typeface="Calibri"/>
+              </a:defRPr>
+            </a:pPr>
+            <a:r>
+              <a:t>Étapes Clés de Développement :</a:t>
+            </a:r>
+            <a:br/>
+            <a:r>
+              <a:t>Nettoyage de l'historique des cas de fraude, modélisation des schémas, indexation de la base.</a:t>
             </a:r>
           </a:p>
         </p:txBody>
@@ -9257,7 +9058,7 @@
 </file>
 
 <file path=ppt/slides/slide5.xml><?xml version="1.0" encoding="utf-8"?>
-<p:sld xmlns:a="http://schemas.openxmlformats.org/drawingml/2006/main" xmlns:p="http://schemas.openxmlformats.org/presentationml/2006/main" xmlns:r="http://schemas.openxmlformats.org/officeDocument/2006/relationships">
+<p:sld xmlns:a="http://schemas.openxmlformats.org/drawingml/2006/main" xmlns:r="http://schemas.openxmlformats.org/officeDocument/2006/relationships" xmlns:p="http://schemas.openxmlformats.org/presentationml/2006/main">
   <p:cSld>
     <p:spTree>
       <p:nvGrpSpPr>
@@ -9265,7 +9066,14 @@
         <p:cNvGrpSpPr/>
         <p:nvPr/>
       </p:nvGrpSpPr>
-      <p:grpSpPr/>
+      <p:grpSpPr>
+        <a:xfrm>
+          <a:off x="0" y="0"/>
+          <a:ext cx="0" cy="0"/>
+          <a:chOff x="0" y="0"/>
+          <a:chExt cx="0" cy="0"/>
+        </a:xfrm>
+      </p:grpSpPr>
       <p:sp>
         <p:nvSpPr>
           <p:cNvPr id="2" name="Rectangle 1"/>
@@ -9306,6 +9114,7 @@
           <a:lstStyle/>
           <a:p>
             <a:pPr algn="ctr"/>
+            <a:endParaRPr/>
           </a:p>
         </p:txBody>
       </p:sp>
@@ -9326,7 +9135,7 @@
           <a:noFill/>
         </p:spPr>
         <p:txBody>
-          <a:bodyPr wrap="square" lIns="0" tIns="0" bIns="0" rIns="0">
+          <a:bodyPr wrap="square" lIns="0" tIns="0" rIns="0" bIns="0">
             <a:spAutoFit/>
           </a:bodyPr>
           <a:lstStyle/>
@@ -9362,7 +9171,7 @@
           <a:noFill/>
         </p:spPr>
         <p:txBody>
-          <a:bodyPr wrap="square" lIns="0" tIns="0" bIns="0" rIns="0">
+          <a:bodyPr wrap="square" lIns="0" tIns="0" rIns="0" bIns="0">
             <a:spAutoFit/>
           </a:bodyPr>
           <a:lstStyle/>
@@ -9376,7 +9185,7 @@
               </a:defRPr>
             </a:pPr>
             <a:r>
-              <a:t>4.1 Capacité : Fraud Knowledge Base</a:t>
+              <a:t>4.2 Capacité : Fraud Detection Engine</a:t>
             </a:r>
           </a:p>
         </p:txBody>
@@ -9421,6 +9230,7 @@
           <a:lstStyle/>
           <a:p>
             <a:pPr algn="ctr"/>
+            <a:endParaRPr/>
           </a:p>
         </p:txBody>
       </p:sp>
@@ -9441,7 +9251,7 @@
           <a:noFill/>
         </p:spPr>
         <p:txBody>
-          <a:bodyPr wrap="none" lIns="0" tIns="0" bIns="0" rIns="0">
+          <a:bodyPr wrap="none" lIns="0" tIns="0" rIns="0" bIns="0">
             <a:spAutoFit/>
           </a:bodyPr>
           <a:lstStyle/>
@@ -9455,7 +9265,7 @@
               </a:defRPr>
             </a:pPr>
             <a:r>
-              <a:t>Ekinox Consulting  |  Proposition de Transformation  |  Confidentialité SanlamAllianz  |  Slide 5</a:t>
+              <a:t>Ekinox Consulting  |  Proposition de Transformation  |  Confidentialité SanlamAllianz  |  Slide 6</a:t>
             </a:r>
           </a:p>
         </p:txBody>
@@ -9502,6 +9312,7 @@
           <a:lstStyle/>
           <a:p>
             <a:pPr algn="ctr"/>
+            <a:endParaRPr/>
           </a:p>
         </p:txBody>
       </p:sp>
@@ -9545,6 +9356,7 @@
           <a:lstStyle/>
           <a:p>
             <a:pPr algn="ctr"/>
+            <a:endParaRPr/>
           </a:p>
         </p:txBody>
       </p:sp>
@@ -9605,7 +9417,7 @@
             </a:r>
             <a:br/>
             <a:r>
-              <a:t>La mémoire institutionnelle de lutte anti-fraude, digitalisée et accessible.</a:t>
+              <a:t>Un bouclier intelligent qui analyse chaque sinistre déclaré.</a:t>
             </a:r>
           </a:p>
           <a:p>
@@ -9628,7 +9440,7 @@
             </a:r>
             <a:br/>
             <a:r>
-              <a:t>Centralise les schémas de fraude connus, les modus operandi et les cas de jurisprudence.</a:t>
+              <a:t>Automatise le tri des sinistres pour séparer les cas légitimes des cas suspects nécessitant une investigation.</a:t>
             </a:r>
           </a:p>
           <a:p>
@@ -9651,7 +9463,7 @@
             </a:r>
             <a:br/>
             <a:r>
-              <a:t>Lorsqu'un nouveau type d'arnaque au bris de glace est identifié, il est documenté et sert de référence pour la détection future.</a:t>
+              <a:t>Le moteur score un sinistre avec une forte probabilité de légitimité, permettant un règlement instantané (Fast-Track).</a:t>
             </a:r>
           </a:p>
           <a:p>
@@ -9674,7 +9486,7 @@
             </a:r>
             <a:br/>
             <a:r>
-              <a:t>Augmentation immédiate du niveau de compétence de tous les gestionnaires face à des fraudes complexes.</a:t>
+              <a:t>Règlement plus rapide pour les bons clients et blocage préventif des paiements suspects.</a:t>
             </a:r>
           </a:p>
         </p:txBody>
@@ -9721,6 +9533,7 @@
           <a:lstStyle/>
           <a:p>
             <a:pPr algn="ctr"/>
+            <a:endParaRPr/>
           </a:p>
         </p:txBody>
       </p:sp>
@@ -9764,6 +9577,7 @@
           <a:lstStyle/>
           <a:p>
             <a:pPr algn="ctr"/>
+            <a:endParaRPr/>
           </a:p>
         </p:txBody>
       </p:sp>
@@ -9824,7 +9638,7 @@
             </a:r>
             <a:br/>
             <a:r>
-              <a:t>Historique des cas avérés de fraude, fiches de typologies de fraude, rapports d'experts.</a:t>
+              <a:t>Données structurées du sinistre (date, lieu, montants), historique du client.</a:t>
             </a:r>
           </a:p>
           <a:p>
@@ -9847,7 +9661,7 @@
             </a:r>
             <a:br/>
             <a:r>
-              <a:t>Système de gestion de contenu structuré, moteur de recherche sémantique.</a:t>
+              <a:t>Moteur de règles métier (Drools/Python), composant d'analyse de texte (NLP).</a:t>
             </a:r>
           </a:p>
           <a:p>
@@ -9870,7 +9684,7 @@
             </a:r>
             <a:br/>
             <a:r>
-              <a:t>API de recherche de typologies, API d'ajout de cas de référence.</a:t>
+              <a:t>API de scoring de sinistre.</a:t>
             </a:r>
           </a:p>
           <a:p>
@@ -9893,7 +9707,7 @@
             </a:r>
             <a:br/>
             <a:r>
-              <a:t>Nettoyage de l'historique des cas de fraude, modélisation des schémas, indexation de la base.</a:t>
+              <a:t>Définition des règles métier de premier niveau, implémentation de l'algorithme de tri, création du pipeline de scoring.</a:t>
             </a:r>
           </a:p>
         </p:txBody>
@@ -9907,7 +9721,7 @@
 </file>
 
 <file path=ppt/slides/slide6.xml><?xml version="1.0" encoding="utf-8"?>
-<p:sld xmlns:a="http://schemas.openxmlformats.org/drawingml/2006/main" xmlns:p="http://schemas.openxmlformats.org/presentationml/2006/main" xmlns:r="http://schemas.openxmlformats.org/officeDocument/2006/relationships">
+<p:sld xmlns:a="http://schemas.openxmlformats.org/drawingml/2006/main" xmlns:r="http://schemas.openxmlformats.org/officeDocument/2006/relationships" xmlns:p="http://schemas.openxmlformats.org/presentationml/2006/main">
   <p:cSld>
     <p:spTree>
       <p:nvGrpSpPr>
@@ -9915,7 +9729,14 @@
         <p:cNvGrpSpPr/>
         <p:nvPr/>
       </p:nvGrpSpPr>
-      <p:grpSpPr/>
+      <p:grpSpPr>
+        <a:xfrm>
+          <a:off x="0" y="0"/>
+          <a:ext cx="0" cy="0"/>
+          <a:chOff x="0" y="0"/>
+          <a:chExt cx="0" cy="0"/>
+        </a:xfrm>
+      </p:grpSpPr>
       <p:sp>
         <p:nvSpPr>
           <p:cNvPr id="2" name="Rectangle 1"/>
@@ -9956,6 +9777,7 @@
           <a:lstStyle/>
           <a:p>
             <a:pPr algn="ctr"/>
+            <a:endParaRPr/>
           </a:p>
         </p:txBody>
       </p:sp>
@@ -9976,7 +9798,7 @@
           <a:noFill/>
         </p:spPr>
         <p:txBody>
-          <a:bodyPr wrap="square" lIns="0" tIns="0" bIns="0" rIns="0">
+          <a:bodyPr wrap="square" lIns="0" tIns="0" rIns="0" bIns="0">
             <a:spAutoFit/>
           </a:bodyPr>
           <a:lstStyle/>
@@ -10012,7 +9834,7 @@
           <a:noFill/>
         </p:spPr>
         <p:txBody>
-          <a:bodyPr wrap="square" lIns="0" tIns="0" bIns="0" rIns="0">
+          <a:bodyPr wrap="square" lIns="0" tIns="0" rIns="0" bIns="0">
             <a:spAutoFit/>
           </a:bodyPr>
           <a:lstStyle/>
@@ -10026,7 +9848,7 @@
               </a:defRPr>
             </a:pPr>
             <a:r>
-              <a:t>4.2 Capacité : Fraud Detection Engine</a:t>
+              <a:t>4.3 Capacité : Fraud Investigation Workspace</a:t>
             </a:r>
           </a:p>
         </p:txBody>
@@ -10071,6 +9893,7 @@
           <a:lstStyle/>
           <a:p>
             <a:pPr algn="ctr"/>
+            <a:endParaRPr/>
           </a:p>
         </p:txBody>
       </p:sp>
@@ -10091,7 +9914,7 @@
           <a:noFill/>
         </p:spPr>
         <p:txBody>
-          <a:bodyPr wrap="none" lIns="0" tIns="0" bIns="0" rIns="0">
+          <a:bodyPr wrap="none" lIns="0" tIns="0" rIns="0" bIns="0">
             <a:spAutoFit/>
           </a:bodyPr>
           <a:lstStyle/>
@@ -10105,7 +9928,7 @@
               </a:defRPr>
             </a:pPr>
             <a:r>
-              <a:t>Ekinox Consulting  |  Proposition de Transformation  |  Confidentialité SanlamAllianz  |  Slide 6</a:t>
+              <a:t>Ekinox Consulting  |  Proposition de Transformation  |  Confidentialité SanlamAllianz  |  Slide 7</a:t>
             </a:r>
           </a:p>
         </p:txBody>
@@ -10152,6 +9975,7 @@
           <a:lstStyle/>
           <a:p>
             <a:pPr algn="ctr"/>
+            <a:endParaRPr/>
           </a:p>
         </p:txBody>
       </p:sp>
@@ -10195,6 +10019,7 @@
           <a:lstStyle/>
           <a:p>
             <a:pPr algn="ctr"/>
+            <a:endParaRPr/>
           </a:p>
         </p:txBody>
       </p:sp>
@@ -10255,7 +10080,7 @@
             </a:r>
             <a:br/>
             <a:r>
-              <a:t>Un bouclier intelligent qui analyse chaque sinistre déclaré.</a:t>
+              <a:t>Le bureau digital de l'investigateur anti-fraude.</a:t>
             </a:r>
           </a:p>
           <a:p>
@@ -10278,7 +10103,7 @@
             </a:r>
             <a:br/>
             <a:r>
-              <a:t>Automatise le tri des sinistres pour séparer les cas légitimes des cas suspects nécessitant une investigation.</a:t>
+              <a:t>Fournit une vue à 360 degrés du dossier suspect, regroupant la chronologie, les pièces et les notes d'analyse.</a:t>
             </a:r>
           </a:p>
           <a:p>
@@ -10301,7 +10126,7 @@
             </a:r>
             <a:br/>
             <a:r>
-              <a:t>Le moteur score un sinistre avec une forte probabilité de légitimité, permettant un règlement instantané (Fast-Track).</a:t>
+              <a:t>L'investigateur accède à une interface centralisant la déclaration de sinistre, les photos du véhicule et les alertes du système.</a:t>
             </a:r>
           </a:p>
           <a:p>
@@ -10324,7 +10149,7 @@
             </a:r>
             <a:br/>
             <a:r>
-              <a:t>Règlement plus rapide pour les bons clients et blocage préventif des paiements suspects.</a:t>
+              <a:t>Gain de productivité massif dans l'instruction des dossiers suspects, décisions plus fiables.</a:t>
             </a:r>
           </a:p>
         </p:txBody>
@@ -10371,6 +10196,7 @@
           <a:lstStyle/>
           <a:p>
             <a:pPr algn="ctr"/>
+            <a:endParaRPr/>
           </a:p>
         </p:txBody>
       </p:sp>
@@ -10414,6 +10240,7 @@
           <a:lstStyle/>
           <a:p>
             <a:pPr algn="ctr"/>
+            <a:endParaRPr/>
           </a:p>
         </p:txBody>
       </p:sp>
@@ -10474,7 +10301,7 @@
             </a:r>
             <a:br/>
             <a:r>
-              <a:t>Données structurées du sinistre (date, lieu, montants), historique du client.</a:t>
+              <a:t>Données complètes du dossier de sinistre, historique des interactions, documents joints.</a:t>
             </a:r>
           </a:p>
           <a:p>
@@ -10497,7 +10324,7 @@
             </a:r>
             <a:br/>
             <a:r>
-              <a:t>Moteur de règles métier (Drools/Python), composant d'analyse de texte (NLP).</a:t>
+              <a:t>Interface web dédiée, module de gestion de workflow.</a:t>
             </a:r>
           </a:p>
           <a:p>
@@ -10520,7 +10347,7 @@
             </a:r>
             <a:br/>
             <a:r>
-              <a:t>API de scoring de sinistre.</a:t>
+              <a:t>API d'accès au dossier complet, API de mise à jour de statut.</a:t>
             </a:r>
           </a:p>
           <a:p>
@@ -10543,7 +10370,7 @@
             </a:r>
             <a:br/>
             <a:r>
-              <a:t>Définition des règles métier de premier niveau, implémentation de l'algorithme de tri, création du pipeline de scoring.</a:t>
+              <a:t>Création du tableau de bord de l'investigateur, développement de la timeline du sinistre, gestion des statuts de dossier.</a:t>
             </a:r>
           </a:p>
         </p:txBody>
@@ -10557,7 +10384,7 @@
 </file>
 
 <file path=ppt/slides/slide7.xml><?xml version="1.0" encoding="utf-8"?>
-<p:sld xmlns:a="http://schemas.openxmlformats.org/drawingml/2006/main" xmlns:p="http://schemas.openxmlformats.org/presentationml/2006/main" xmlns:r="http://schemas.openxmlformats.org/officeDocument/2006/relationships">
+<p:sld xmlns:a="http://schemas.openxmlformats.org/drawingml/2006/main" xmlns:r="http://schemas.openxmlformats.org/officeDocument/2006/relationships" xmlns:p="http://schemas.openxmlformats.org/presentationml/2006/main">
   <p:cSld>
     <p:spTree>
       <p:nvGrpSpPr>
@@ -10565,7 +10392,14 @@
         <p:cNvGrpSpPr/>
         <p:nvPr/>
       </p:nvGrpSpPr>
-      <p:grpSpPr/>
+      <p:grpSpPr>
+        <a:xfrm>
+          <a:off x="0" y="0"/>
+          <a:ext cx="0" cy="0"/>
+          <a:chOff x="0" y="0"/>
+          <a:chExt cx="0" cy="0"/>
+        </a:xfrm>
+      </p:grpSpPr>
       <p:sp>
         <p:nvSpPr>
           <p:cNvPr id="2" name="Rectangle 1"/>
@@ -10606,6 +10440,7 @@
           <a:lstStyle/>
           <a:p>
             <a:pPr algn="ctr"/>
+            <a:endParaRPr/>
           </a:p>
         </p:txBody>
       </p:sp>
@@ -10626,7 +10461,7 @@
           <a:noFill/>
         </p:spPr>
         <p:txBody>
-          <a:bodyPr wrap="square" lIns="0" tIns="0" bIns="0" rIns="0">
+          <a:bodyPr wrap="square" lIns="0" tIns="0" rIns="0" bIns="0">
             <a:spAutoFit/>
           </a:bodyPr>
           <a:lstStyle/>
@@ -10662,7 +10497,7 @@
           <a:noFill/>
         </p:spPr>
         <p:txBody>
-          <a:bodyPr wrap="square" lIns="0" tIns="0" bIns="0" rIns="0">
+          <a:bodyPr wrap="square" lIns="0" tIns="0" rIns="0" bIns="0">
             <a:spAutoFit/>
           </a:bodyPr>
           <a:lstStyle/>
@@ -10676,7 +10511,7 @@
               </a:defRPr>
             </a:pPr>
             <a:r>
-              <a:t>4.3 Capacité : Fraud Investigation Workspace</a:t>
+              <a:t>4.4 Capacité : Fraud Network Explorer</a:t>
             </a:r>
           </a:p>
         </p:txBody>
@@ -10721,6 +10556,7 @@
           <a:lstStyle/>
           <a:p>
             <a:pPr algn="ctr"/>
+            <a:endParaRPr/>
           </a:p>
         </p:txBody>
       </p:sp>
@@ -10741,7 +10577,7 @@
           <a:noFill/>
         </p:spPr>
         <p:txBody>
-          <a:bodyPr wrap="none" lIns="0" tIns="0" bIns="0" rIns="0">
+          <a:bodyPr wrap="none" lIns="0" tIns="0" rIns="0" bIns="0">
             <a:spAutoFit/>
           </a:bodyPr>
           <a:lstStyle/>
@@ -10755,7 +10591,7 @@
               </a:defRPr>
             </a:pPr>
             <a:r>
-              <a:t>Ekinox Consulting  |  Proposition de Transformation  |  Confidentialité SanlamAllianz  |  Slide 7</a:t>
+              <a:t>Ekinox Consulting  |  Proposition de Transformation  |  Confidentialité SanlamAllianz  |  Slide 8</a:t>
             </a:r>
           </a:p>
         </p:txBody>
@@ -10802,6 +10638,7 @@
           <a:lstStyle/>
           <a:p>
             <a:pPr algn="ctr"/>
+            <a:endParaRPr/>
           </a:p>
         </p:txBody>
       </p:sp>
@@ -10845,6 +10682,7 @@
           <a:lstStyle/>
           <a:p>
             <a:pPr algn="ctr"/>
+            <a:endParaRPr/>
           </a:p>
         </p:txBody>
       </p:sp>
@@ -10905,7 +10743,7 @@
             </a:r>
             <a:br/>
             <a:r>
-              <a:t>Le bureau digital de l'investigateur anti-fraude.</a:t>
+              <a:t>Révéler les liens invisibles entre les acteurs d'une fraude organisée.</a:t>
             </a:r>
           </a:p>
           <a:p>
@@ -10928,7 +10766,7 @@
             </a:r>
             <a:br/>
             <a:r>
-              <a:t>Fournit une vue à 360 degrés du dossier suspect, regroupant la chronologie, les pièces et les notes d'analyse.</a:t>
+              <a:t>Visualise les connexions entre différents sinistres, assurés, experts ou garages pour détecter les réseaux de fraude.</a:t>
             </a:r>
           </a:p>
           <a:p>
@@ -10951,7 +10789,7 @@
             </a:r>
             <a:br/>
             <a:r>
-              <a:t>L'investigateur accède à une interface centralisant la déclaration de sinistre, les photos du véhicule et les alertes du système.</a:t>
+              <a:t>L'interface met en évidence qu'un même numéro de téléphone est lié à trois sinistres différents déclarés par des personnes distinctes.</a:t>
             </a:r>
           </a:p>
           <a:p>
@@ -10974,7 +10812,7 @@
             </a:r>
             <a:br/>
             <a:r>
-              <a:t>Gain de productivité massif dans l'instruction des dossiers suspects, décisions plus fiables.</a:t>
+              <a:t>Démantèlement de réseaux de fraude organisée, générant des économies d'échelle majeures.</a:t>
             </a:r>
           </a:p>
         </p:txBody>
@@ -11021,6 +10859,7 @@
           <a:lstStyle/>
           <a:p>
             <a:pPr algn="ctr"/>
+            <a:endParaRPr/>
           </a:p>
         </p:txBody>
       </p:sp>
@@ -11064,6 +10903,7 @@
           <a:lstStyle/>
           <a:p>
             <a:pPr algn="ctr"/>
+            <a:endParaRPr/>
           </a:p>
         </p:txBody>
       </p:sp>
@@ -11124,7 +10964,7 @@
             </a:r>
             <a:br/>
             <a:r>
-              <a:t>Données complètes du dossier de sinistre, historique des interactions, documents joints.</a:t>
+              <a:t>Base de données clients et sinistres étendue, identifiants partagés (téléphone, IBAN, adresses).</a:t>
             </a:r>
           </a:p>
           <a:p>
@@ -11147,7 +10987,7 @@
             </a:r>
             <a:br/>
             <a:r>
-              <a:t>Interface web dédiée, module de gestion de workflow.</a:t>
+              <a:t>Base de données graphe légère, bibliothèque de visualisation de graphes (ex: D3.js, Cytoscape).</a:t>
             </a:r>
           </a:p>
           <a:p>
@@ -11170,7 +11010,7 @@
             </a:r>
             <a:br/>
             <a:r>
-              <a:t>API d'accès au dossier complet, API de mise à jour de statut.</a:t>
+              <a:t>API d'extraction de sous-graphes.</a:t>
             </a:r>
           </a:p>
           <a:p>
@@ -11193,7 +11033,7 @@
             </a:r>
             <a:br/>
             <a:r>
-              <a:t>Création du tableau de bord de l'investigateur, développement de la timeline du sinistre, gestion des statuts de dossier.</a:t>
+              <a:t>Modélisation des données en noeuds (personnes, véhicules) et relations, développement du visualiseur interactif.</a:t>
             </a:r>
           </a:p>
         </p:txBody>
@@ -11207,7 +11047,7 @@
 </file>
 
 <file path=ppt/slides/slide8.xml><?xml version="1.0" encoding="utf-8"?>
-<p:sld xmlns:a="http://schemas.openxmlformats.org/drawingml/2006/main" xmlns:p="http://schemas.openxmlformats.org/presentationml/2006/main" xmlns:r="http://schemas.openxmlformats.org/officeDocument/2006/relationships">
+<p:sld xmlns:a="http://schemas.openxmlformats.org/drawingml/2006/main" xmlns:r="http://schemas.openxmlformats.org/officeDocument/2006/relationships" xmlns:p="http://schemas.openxmlformats.org/presentationml/2006/main">
   <p:cSld>
     <p:spTree>
       <p:nvGrpSpPr>
@@ -11215,7 +11055,14 @@
         <p:cNvGrpSpPr/>
         <p:nvPr/>
       </p:nvGrpSpPr>
-      <p:grpSpPr/>
+      <p:grpSpPr>
+        <a:xfrm>
+          <a:off x="0" y="0"/>
+          <a:ext cx="0" cy="0"/>
+          <a:chOff x="0" y="0"/>
+          <a:chExt cx="0" cy="0"/>
+        </a:xfrm>
+      </p:grpSpPr>
       <p:sp>
         <p:nvSpPr>
           <p:cNvPr id="2" name="Rectangle 1"/>
@@ -11256,6 +11103,7 @@
           <a:lstStyle/>
           <a:p>
             <a:pPr algn="ctr"/>
+            <a:endParaRPr/>
           </a:p>
         </p:txBody>
       </p:sp>
@@ -11276,7 +11124,7 @@
           <a:noFill/>
         </p:spPr>
         <p:txBody>
-          <a:bodyPr wrap="square" lIns="0" tIns="0" bIns="0" rIns="0">
+          <a:bodyPr wrap="square" lIns="0" tIns="0" rIns="0" bIns="0">
             <a:spAutoFit/>
           </a:bodyPr>
           <a:lstStyle/>
@@ -11312,7 +11160,7 @@
           <a:noFill/>
         </p:spPr>
         <p:txBody>
-          <a:bodyPr wrap="square" lIns="0" tIns="0" bIns="0" rIns="0">
+          <a:bodyPr wrap="square" lIns="0" tIns="0" rIns="0" bIns="0">
             <a:spAutoFit/>
           </a:bodyPr>
           <a:lstStyle/>
@@ -11326,7 +11174,7 @@
               </a:defRPr>
             </a:pPr>
             <a:r>
-              <a:t>4.4 Capacité : Fraud Network Explorer</a:t>
+              <a:t>4.5 Capacité : Explainable AI</a:t>
             </a:r>
           </a:p>
         </p:txBody>
@@ -11371,6 +11219,7 @@
           <a:lstStyle/>
           <a:p>
             <a:pPr algn="ctr"/>
+            <a:endParaRPr/>
           </a:p>
         </p:txBody>
       </p:sp>
@@ -11391,7 +11240,7 @@
           <a:noFill/>
         </p:spPr>
         <p:txBody>
-          <a:bodyPr wrap="none" lIns="0" tIns="0" bIns="0" rIns="0">
+          <a:bodyPr wrap="none" lIns="0" tIns="0" rIns="0" bIns="0">
             <a:spAutoFit/>
           </a:bodyPr>
           <a:lstStyle/>
@@ -11405,7 +11254,7 @@
               </a:defRPr>
             </a:pPr>
             <a:r>
-              <a:t>Ekinox Consulting  |  Proposition de Transformation  |  Confidentialité SanlamAllianz  |  Slide 8</a:t>
+              <a:t>Ekinox Consulting  |  Proposition de Transformation  |  Confidentialité SanlamAllianz  |  Slide 9</a:t>
             </a:r>
           </a:p>
         </p:txBody>
@@ -11452,6 +11301,7 @@
           <a:lstStyle/>
           <a:p>
             <a:pPr algn="ctr"/>
+            <a:endParaRPr/>
           </a:p>
         </p:txBody>
       </p:sp>
@@ -11495,6 +11345,7 @@
           <a:lstStyle/>
           <a:p>
             <a:pPr algn="ctr"/>
+            <a:endParaRPr/>
           </a:p>
         </p:txBody>
       </p:sp>
@@ -11555,7 +11406,7 @@
             </a:r>
             <a:br/>
             <a:r>
-              <a:t>Révéler les liens invisibles entre les acteurs d'une fraude organisée.</a:t>
+              <a:t>La confiance naît de la transparence et de l'explication.</a:t>
             </a:r>
           </a:p>
           <a:p>
@@ -11578,7 +11429,7 @@
             </a:r>
             <a:br/>
             <a:r>
-              <a:t>Visualise les connexions entre différents sinistres, assurés, experts ou garages pour détecter les réseaux de fraude.</a:t>
+              <a:t>Justifie en langage clair et factuel chaque alerte de fraude remontée par le système.</a:t>
             </a:r>
           </a:p>
           <a:p>
@@ -11601,7 +11452,7 @@
             </a:r>
             <a:br/>
             <a:r>
-              <a:t>L'interface met en évidence qu'un même numéro de téléphone est lié à trois sinistres différents déclarés par des personnes distinctes.</a:t>
+              <a:t>Le système indique qu'une alerte est levée car : 1. La déclaration a eu lieu 2 heures après la souscription, 2. La facture du garage semble altérée.</a:t>
             </a:r>
           </a:p>
           <a:p>
@@ -11624,7 +11475,7 @@
             </a:r>
             <a:br/>
             <a:r>
-              <a:t>Démantèlement de réseaux de fraude organisée, générant des économies d'échelle majeures.</a:t>
+              <a:t>Adoption de l'outil par les équipes métier, justification solide en cas de contentieux avec l'assuré.</a:t>
             </a:r>
           </a:p>
         </p:txBody>
@@ -11671,6 +11522,7 @@
           <a:lstStyle/>
           <a:p>
             <a:pPr algn="ctr"/>
+            <a:endParaRPr/>
           </a:p>
         </p:txBody>
       </p:sp>
@@ -11714,6 +11566,7 @@
           <a:lstStyle/>
           <a:p>
             <a:pPr algn="ctr"/>
+            <a:endParaRPr/>
           </a:p>
         </p:txBody>
       </p:sp>
@@ -11774,7 +11627,7 @@
             </a:r>
             <a:br/>
             <a:r>
-              <a:t>Base de données clients et sinistres étendue, identifiants partagés (téléphone, IBAN, adresses).</a:t>
+              <a:t>Poids des règles déclenchées, extraits de textes pertinents ayant généré l'alerte.</a:t>
             </a:r>
           </a:p>
           <a:p>
@@ -11797,7 +11650,7 @@
             </a:r>
             <a:br/>
             <a:r>
-              <a:t>Base de données graphe légère, bibliothèque de visualisation de graphes (ex: D3.js, Cytoscape).</a:t>
+              <a:t>Générateur de textes à partir de templates, module de traçabilité des décisions.</a:t>
             </a:r>
           </a:p>
           <a:p>
@@ -11820,7 +11673,7 @@
             </a:r>
             <a:br/>
             <a:r>
-              <a:t>API d'extraction de sous-graphes.</a:t>
+              <a:t>API de génération d'explications de score.</a:t>
             </a:r>
           </a:p>
           <a:p>
@@ -11843,7 +11696,7 @@
             </a:r>
             <a:br/>
             <a:r>
-              <a:t>Modélisation des données en noeuds (personnes, véhicules) et relations, développement du visualiseur interactif.</a:t>
+              <a:t>Mapping entre règles déclenchées et explications textuelles, mise en évidence des éléments de preuve dans l'interface.</a:t>
             </a:r>
           </a:p>
         </p:txBody>
@@ -11857,7 +11710,7 @@
 </file>
 
 <file path=ppt/slides/slide9.xml><?xml version="1.0" encoding="utf-8"?>
-<p:sld xmlns:a="http://schemas.openxmlformats.org/drawingml/2006/main" xmlns:p="http://schemas.openxmlformats.org/presentationml/2006/main" xmlns:r="http://schemas.openxmlformats.org/officeDocument/2006/relationships">
+<p:sld xmlns:a="http://schemas.openxmlformats.org/drawingml/2006/main" xmlns:r="http://schemas.openxmlformats.org/officeDocument/2006/relationships" xmlns:p="http://schemas.openxmlformats.org/presentationml/2006/main">
   <p:cSld>
     <p:spTree>
       <p:nvGrpSpPr>
@@ -11865,7 +11718,14 @@
         <p:cNvGrpSpPr/>
         <p:nvPr/>
       </p:nvGrpSpPr>
-      <p:grpSpPr/>
+      <p:grpSpPr>
+        <a:xfrm>
+          <a:off x="0" y="0"/>
+          <a:ext cx="0" cy="0"/>
+          <a:chOff x="0" y="0"/>
+          <a:chExt cx="0" cy="0"/>
+        </a:xfrm>
+      </p:grpSpPr>
       <p:sp>
         <p:nvSpPr>
           <p:cNvPr id="2" name="Rectangle 1"/>
@@ -11906,6 +11766,7 @@
           <a:lstStyle/>
           <a:p>
             <a:pPr algn="ctr"/>
+            <a:endParaRPr/>
           </a:p>
         </p:txBody>
       </p:sp>
@@ -11926,7 +11787,7 @@
           <a:noFill/>
         </p:spPr>
         <p:txBody>
-          <a:bodyPr wrap="square" lIns="0" tIns="0" bIns="0" rIns="0">
+          <a:bodyPr wrap="square" lIns="0" tIns="0" rIns="0" bIns="0">
             <a:spAutoFit/>
           </a:bodyPr>
           <a:lstStyle/>
@@ -11962,7 +11823,7 @@
           <a:noFill/>
         </p:spPr>
         <p:txBody>
-          <a:bodyPr wrap="square" lIns="0" tIns="0" bIns="0" rIns="0">
+          <a:bodyPr wrap="square" lIns="0" tIns="0" rIns="0" bIns="0">
             <a:spAutoFit/>
           </a:bodyPr>
           <a:lstStyle/>
@@ -11976,7 +11837,7 @@
               </a:defRPr>
             </a:pPr>
             <a:r>
-              <a:t>4.5 Capacité : Explainable AI</a:t>
+              <a:t>4.6 Capacité : Case Prioritization</a:t>
             </a:r>
           </a:p>
         </p:txBody>
@@ -12021,6 +11882,7 @@
           <a:lstStyle/>
           <a:p>
             <a:pPr algn="ctr"/>
+            <a:endParaRPr/>
           </a:p>
         </p:txBody>
       </p:sp>
@@ -12041,7 +11903,7 @@
           <a:noFill/>
         </p:spPr>
         <p:txBody>
-          <a:bodyPr wrap="none" lIns="0" tIns="0" bIns="0" rIns="0">
+          <a:bodyPr wrap="none" lIns="0" tIns="0" rIns="0" bIns="0">
             <a:spAutoFit/>
           </a:bodyPr>
           <a:lstStyle/>
@@ -12055,7 +11917,7 @@
               </a:defRPr>
             </a:pPr>
             <a:r>
-              <a:t>Ekinox Consulting  |  Proposition de Transformation  |  Confidentialité SanlamAllianz  |  Slide 9</a:t>
+              <a:t>Ekinox Consulting  |  Proposition de Transformation  |  Confidentialité SanlamAllianz  |  Slide 10</a:t>
             </a:r>
           </a:p>
         </p:txBody>
@@ -12102,6 +11964,7 @@
           <a:lstStyle/>
           <a:p>
             <a:pPr algn="ctr"/>
+            <a:endParaRPr/>
           </a:p>
         </p:txBody>
       </p:sp>
@@ -12145,6 +12008,7 @@
           <a:lstStyle/>
           <a:p>
             <a:pPr algn="ctr"/>
+            <a:endParaRPr/>
           </a:p>
         </p:txBody>
       </p:sp>
@@ -12205,7 +12069,7 @@
             </a:r>
             <a:br/>
             <a:r>
-              <a:t>La confiance naît de la transparence et de l'explication.</a:t>
+              <a:t>Allouer le temps des experts là où l'enjeu financier est maximal.</a:t>
             </a:r>
           </a:p>
           <a:p>
@@ -12228,7 +12092,7 @@
             </a:r>
             <a:br/>
             <a:r>
-              <a:t>Justifie en langage clair et factuel chaque alerte de fraude remontée par le système.</a:t>
+              <a:t>Trie automatiquement la file de travail des investigateurs selon la probabilité de fraude et l'enjeu financier du sinistre.</a:t>
             </a:r>
           </a:p>
           <a:p>
@@ -12251,7 +12115,7 @@
             </a:r>
             <a:br/>
             <a:r>
-              <a:t>Le système indique qu'une alerte est levée car : 1. La déclaration a eu lieu 2 heures après la souscription, 2. La facture du garage semble altérée.</a:t>
+              <a:t>En début de journée, le gestionnaire voit en haut de sa liste un dossier suspect d'incendie estimé à 50 000€, avant les petits accrochages.</a:t>
             </a:r>
           </a:p>
           <a:p>
@@ -12274,7 +12138,7 @@
             </a:r>
             <a:br/>
             <a:r>
-              <a:t>Adoption de l'outil par les équipes métier, justification solide en cas de contentieux avec l'assuré.</a:t>
+              <a:t>Optimisation drastique du Retour sur Investissement du temps passé par les équipes de contrôle.</a:t>
             </a:r>
           </a:p>
         </p:txBody>
@@ -12321,6 +12185,7 @@
           <a:lstStyle/>
           <a:p>
             <a:pPr algn="ctr"/>
+            <a:endParaRPr/>
           </a:p>
         </p:txBody>
       </p:sp>
@@ -12364,6 +12229,7 @@
           <a:lstStyle/>
           <a:p>
             <a:pPr algn="ctr"/>
+            <a:endParaRPr/>
           </a:p>
         </p:txBody>
       </p:sp>
@@ -12424,7 +12290,7 @@
             </a:r>
             <a:br/>
             <a:r>
-              <a:t>Poids des règles déclenchées, extraits de textes pertinents ayant généré l'alerte.</a:t>
+              <a:t>Montant estimé du sinistre, score de probabilité de fraude.</a:t>
             </a:r>
           </a:p>
           <a:p>
@@ -12447,7 +12313,7 @@
             </a:r>
             <a:br/>
             <a:r>
-              <a:t>Générateur de textes à partir de templates, module de traçabilité des décisions.</a:t>
+              <a:t>File de traitement priorisée, algorithmes de tri dynamiques.</a:t>
             </a:r>
           </a:p>
           <a:p>
@@ -12470,7 +12336,7 @@
             </a:r>
             <a:br/>
             <a:r>
-              <a:t>API de génération d'explications de score.</a:t>
+              <a:t>API de récupération de la liste de travail ordonnée.</a:t>
             </a:r>
           </a:p>
           <a:p>
@@ -12493,7 +12359,7 @@
             </a:r>
             <a:br/>
             <a:r>
-              <a:t>Mapping entre règles déclenchées et explications textuelles, mise en évidence des éléments de preuve dans l'interface.</a:t>
+              <a:t>Définition de la matrice criticité/probabilité, implémentation du système de tri dans le Workspace.</a:t>
             </a:r>
           </a:p>
         </p:txBody>
